--- a/docs/Презентация Гамов 04.06.pptx
+++ b/docs/Презентация Гамов 04.06.pptx
@@ -5,7 +5,7 @@
     <p:sldMasterId id="2147483648" r:id="rId1"/>
   </p:sldMasterIdLst>
   <p:notesMasterIdLst>
-    <p:notesMasterId r:id="rId16"/>
+    <p:notesMasterId r:id="rId21"/>
   </p:notesMasterIdLst>
   <p:sldIdLst>
     <p:sldId id="257" r:id="rId2"/>
@@ -17,11 +17,16 @@
     <p:sldId id="318" r:id="rId8"/>
     <p:sldId id="321" r:id="rId9"/>
     <p:sldId id="309" r:id="rId10"/>
-    <p:sldId id="306" r:id="rId11"/>
-    <p:sldId id="316" r:id="rId12"/>
-    <p:sldId id="308" r:id="rId13"/>
-    <p:sldId id="310" r:id="rId14"/>
-    <p:sldId id="322" r:id="rId15"/>
+    <p:sldId id="326" r:id="rId11"/>
+    <p:sldId id="328" r:id="rId12"/>
+    <p:sldId id="306" r:id="rId13"/>
+    <p:sldId id="323" r:id="rId14"/>
+    <p:sldId id="316" r:id="rId15"/>
+    <p:sldId id="324" r:id="rId16"/>
+    <p:sldId id="308" r:id="rId17"/>
+    <p:sldId id="325" r:id="rId18"/>
+    <p:sldId id="310" r:id="rId19"/>
+    <p:sldId id="322" r:id="rId20"/>
   </p:sldIdLst>
   <p:sldSz cx="12192000" cy="6858000"/>
   <p:notesSz cx="6858000" cy="9144000"/>
@@ -213,43 +218,6 @@
   <p:cm authorId="1" dt="2026-06-04T11:37:41.299" idx="5">
     <p:pos x="450" y="1344"/>
     <p:text>укажите возраст ((диапазон (от и до), для которого данная методика будет востребована</p:text>
-    <p:extLst>
-      <p:ext uri="{C676402C-5697-4E1C-873F-D02D1690AC5C}">
-        <p15:threadingInfo xmlns:p15="http://schemas.microsoft.com/office/powerpoint/2012/main" timeZoneBias="-180"/>
-      </p:ext>
-    </p:extLst>
-  </p:cm>
-  <p:cm authorId="1" dt="2026-06-04T11:38:24.986" idx="6">
-    <p:pos x="4818" y="1278"/>
-    <p:text>наставнической</p:text>
-    <p:extLst>
-      <p:ext uri="{C676402C-5697-4E1C-873F-D02D1690AC5C}">
-        <p15:threadingInfo xmlns:p15="http://schemas.microsoft.com/office/powerpoint/2012/main" timeZoneBias="-180"/>
-      </p:ext>
-    </p:extLst>
-  </p:cm>
-</p:cmLst>
-</file>
-
-<file path=ppt/comments/comment4.xml><?xml version="1.0" encoding="utf-8"?>
-<p:cmLst xmlns:a="http://schemas.openxmlformats.org/drawingml/2006/main" xmlns:r="http://schemas.openxmlformats.org/officeDocument/2006/relationships" xmlns:p="http://schemas.openxmlformats.org/presentationml/2006/main">
-  <p:cm authorId="1" dt="2026-06-04T11:39:47.383" idx="7">
-    <p:pos x="6078" y="1272"/>
-    <p:text>Для справки: такая система реализуется в программе РЖД-Бонус</p:text>
-    <p:extLst>
-      <p:ext uri="{C676402C-5697-4E1C-873F-D02D1690AC5C}">
-        <p15:threadingInfo xmlns:p15="http://schemas.microsoft.com/office/powerpoint/2012/main" timeZoneBias="-180"/>
-      </p:ext>
-    </p:extLst>
-  </p:cm>
-</p:cmLst>
-</file>
-
-<file path=ppt/comments/comment5.xml><?xml version="1.0" encoding="utf-8"?>
-<p:cmLst xmlns:a="http://schemas.openxmlformats.org/drawingml/2006/main" xmlns:r="http://schemas.openxmlformats.org/officeDocument/2006/relationships" xmlns:p="http://schemas.openxmlformats.org/presentationml/2006/main">
-  <p:cm authorId="1" dt="2026-06-04T11:46:06.513" idx="9">
-    <p:pos x="4062" y="2850"/>
-    <p:text>Разработана методика и реализован на ее основе сервис</p:text>
     <p:extLst>
       <p:ext uri="{C676402C-5697-4E1C-873F-D02D1690AC5C}">
         <p15:threadingInfo xmlns:p15="http://schemas.microsoft.com/office/powerpoint/2012/main" timeZoneBias="-180"/>
@@ -2183,7 +2151,7 @@
       </dgm:spPr>
     </dgm:pt>
     <dgm:pt modelId="{BBA26809-E33A-8441-BB70-723BCB5A1C85}" type="pres">
-      <dgm:prSet presAssocID="{264106F1-4E3F-1348-9926-864509FC5B26}" presName="txShp" presStyleLbl="node1" presStyleIdx="0" presStyleCnt="5">
+      <dgm:prSet presAssocID="{264106F1-4E3F-1348-9926-864509FC5B26}" presName="txShp" presStyleLbl="node1" presStyleIdx="0" presStyleCnt="5" custScaleY="98902">
         <dgm:presLayoutVars>
           <dgm:bulletEnabled val="1"/>
         </dgm:presLayoutVars>
@@ -2830,8 +2798,8 @@
       </dsp:nvSpPr>
       <dsp:spPr>
         <a:xfrm rot="10800000">
-          <a:off x="1676665" y="4382"/>
-          <a:ext cx="5787620" cy="875524"/>
+          <a:off x="1676665" y="9188"/>
+          <a:ext cx="5787620" cy="865911"/>
         </a:xfrm>
         <a:prstGeom prst="homePlate">
           <a:avLst/>
@@ -2907,8 +2875,8 @@
         </a:p>
       </dsp:txBody>
       <dsp:txXfrm rot="10800000">
-        <a:off x="1895546" y="4382"/>
-        <a:ext cx="5568739" cy="875524"/>
+        <a:off x="1893143" y="9188"/>
+        <a:ext cx="5571142" cy="865911"/>
       </dsp:txXfrm>
     </dsp:sp>
     <dsp:sp modelId="{461663A7-095E-5349-A58D-186EEEBCE797}">
@@ -6533,7 +6501,7 @@
           <a:p>
             <a:fld id="{9D65A6D9-C591-48FC-BCC5-4F44DCD5D36B}" type="datetimeFigureOut">
               <a:rPr lang="en-US" smtClean="0"/>
-              <a:t>6/4/2026</a:t>
+              <a:t>6/7/2026</a:t>
             </a:fld>
             <a:endParaRPr lang="en-US"/>
           </a:p>
@@ -6893,6 +6861,330 @@
         <p:cNvPr id="1" name="">
           <a:extLst>
             <a:ext uri="{FF2B5EF4-FFF2-40B4-BE49-F238E27FC236}">
+              <a16:creationId xmlns:a16="http://schemas.microsoft.com/office/drawing/2014/main" id="{0BE0B087-7714-0C07-968F-5E39AC9143A4}"/>
+            </a:ext>
+          </a:extLst>
+        </p:cNvPr>
+        <p:cNvGrpSpPr/>
+        <p:nvPr/>
+      </p:nvGrpSpPr>
+      <p:grpSpPr>
+        <a:xfrm>
+          <a:off x="0" y="0"/>
+          <a:ext cx="0" cy="0"/>
+          <a:chOff x="0" y="0"/>
+          <a:chExt cx="0" cy="0"/>
+        </a:xfrm>
+      </p:grpSpPr>
+      <p:sp>
+        <p:nvSpPr>
+          <p:cNvPr id="2" name="Образ слайда 1">
+            <a:extLst>
+              <a:ext uri="{FF2B5EF4-FFF2-40B4-BE49-F238E27FC236}">
+                <a16:creationId xmlns:a16="http://schemas.microsoft.com/office/drawing/2014/main" id="{7EEA52C7-89B5-EFB3-EC4A-042E6817F7C3}"/>
+              </a:ext>
+            </a:extLst>
+          </p:cNvPr>
+          <p:cNvSpPr>
+            <a:spLocks noGrp="1" noRot="1" noChangeAspect="1"/>
+          </p:cNvSpPr>
+          <p:nvPr>
+            <p:ph type="sldImg"/>
+          </p:nvPr>
+        </p:nvSpPr>
+        <p:spPr/>
+      </p:sp>
+      <p:sp>
+        <p:nvSpPr>
+          <p:cNvPr id="3" name="Заметки 2">
+            <a:extLst>
+              <a:ext uri="{FF2B5EF4-FFF2-40B4-BE49-F238E27FC236}">
+                <a16:creationId xmlns:a16="http://schemas.microsoft.com/office/drawing/2014/main" id="{EE40F2E9-D194-08E1-B5A4-A597C76AAE05}"/>
+              </a:ext>
+            </a:extLst>
+          </p:cNvPr>
+          <p:cNvSpPr>
+            <a:spLocks noGrp="1"/>
+          </p:cNvSpPr>
+          <p:nvPr>
+            <p:ph type="body" idx="1"/>
+          </p:nvPr>
+        </p:nvSpPr>
+        <p:spPr/>
+        <p:txBody>
+          <a:bodyPr/>
+          <a:lstStyle/>
+          <a:p>
+            <a:endParaRPr lang="ru-RU" dirty="0"/>
+          </a:p>
+        </p:txBody>
+      </p:sp>
+      <p:sp>
+        <p:nvSpPr>
+          <p:cNvPr id="4" name="Номер слайда 3">
+            <a:extLst>
+              <a:ext uri="{FF2B5EF4-FFF2-40B4-BE49-F238E27FC236}">
+                <a16:creationId xmlns:a16="http://schemas.microsoft.com/office/drawing/2014/main" id="{FA2C8316-EE41-4EDD-A47B-0BE2570B6EF2}"/>
+              </a:ext>
+            </a:extLst>
+          </p:cNvPr>
+          <p:cNvSpPr>
+            <a:spLocks noGrp="1"/>
+          </p:cNvSpPr>
+          <p:nvPr>
+            <p:ph type="sldNum" sz="quarter" idx="10"/>
+          </p:nvPr>
+        </p:nvSpPr>
+        <p:spPr/>
+        <p:txBody>
+          <a:bodyPr/>
+          <a:lstStyle/>
+          <a:p>
+            <a:fld id="{BF6F1928-7763-4D19-8FE7-5ACFF015AC24}" type="slidenum">
+              <a:rPr lang="en-US" smtClean="0"/>
+              <a:t>11</a:t>
+            </a:fld>
+            <a:endParaRPr lang="en-US"/>
+          </a:p>
+        </p:txBody>
+      </p:sp>
+    </p:spTree>
+    <p:extLst>
+      <p:ext uri="{BB962C8B-B14F-4D97-AF65-F5344CB8AC3E}">
+        <p14:creationId xmlns:p14="http://schemas.microsoft.com/office/powerpoint/2010/main" val="1821462643"/>
+      </p:ext>
+    </p:extLst>
+  </p:cSld>
+  <p:clrMapOvr>
+    <a:masterClrMapping/>
+  </p:clrMapOvr>
+</p:notes>
+</file>
+
+<file path=ppt/notesSlides/notesSlide11.xml><?xml version="1.0" encoding="utf-8"?>
+<p:notes xmlns:a="http://schemas.openxmlformats.org/drawingml/2006/main" xmlns:r="http://schemas.openxmlformats.org/officeDocument/2006/relationships" xmlns:p="http://schemas.openxmlformats.org/presentationml/2006/main">
+  <p:cSld>
+    <p:spTree>
+      <p:nvGrpSpPr>
+        <p:cNvPr id="1" name="">
+          <a:extLst>
+            <a:ext uri="{FF2B5EF4-FFF2-40B4-BE49-F238E27FC236}">
+              <a16:creationId xmlns:a16="http://schemas.microsoft.com/office/drawing/2014/main" id="{C7DA9331-7E3D-D4D3-588F-6B9DD7074567}"/>
+            </a:ext>
+          </a:extLst>
+        </p:cNvPr>
+        <p:cNvGrpSpPr/>
+        <p:nvPr/>
+      </p:nvGrpSpPr>
+      <p:grpSpPr>
+        <a:xfrm>
+          <a:off x="0" y="0"/>
+          <a:ext cx="0" cy="0"/>
+          <a:chOff x="0" y="0"/>
+          <a:chExt cx="0" cy="0"/>
+        </a:xfrm>
+      </p:grpSpPr>
+      <p:sp>
+        <p:nvSpPr>
+          <p:cNvPr id="2" name="Образ слайда 1">
+            <a:extLst>
+              <a:ext uri="{FF2B5EF4-FFF2-40B4-BE49-F238E27FC236}">
+                <a16:creationId xmlns:a16="http://schemas.microsoft.com/office/drawing/2014/main" id="{B59E5573-1958-E69A-55C5-009C1787664B}"/>
+              </a:ext>
+            </a:extLst>
+          </p:cNvPr>
+          <p:cNvSpPr>
+            <a:spLocks noGrp="1" noRot="1" noChangeAspect="1"/>
+          </p:cNvSpPr>
+          <p:nvPr>
+            <p:ph type="sldImg"/>
+          </p:nvPr>
+        </p:nvSpPr>
+        <p:spPr/>
+      </p:sp>
+      <p:sp>
+        <p:nvSpPr>
+          <p:cNvPr id="3" name="Заметки 2">
+            <a:extLst>
+              <a:ext uri="{FF2B5EF4-FFF2-40B4-BE49-F238E27FC236}">
+                <a16:creationId xmlns:a16="http://schemas.microsoft.com/office/drawing/2014/main" id="{0EEF5F34-0B90-DE41-92FF-3568E40CA1DC}"/>
+              </a:ext>
+            </a:extLst>
+          </p:cNvPr>
+          <p:cNvSpPr>
+            <a:spLocks noGrp="1"/>
+          </p:cNvSpPr>
+          <p:nvPr>
+            <p:ph type="body" idx="1"/>
+          </p:nvPr>
+        </p:nvSpPr>
+        <p:spPr/>
+        <p:txBody>
+          <a:bodyPr/>
+          <a:lstStyle/>
+          <a:p>
+            <a:endParaRPr lang="ru-RU" dirty="0"/>
+          </a:p>
+        </p:txBody>
+      </p:sp>
+      <p:sp>
+        <p:nvSpPr>
+          <p:cNvPr id="4" name="Номер слайда 3">
+            <a:extLst>
+              <a:ext uri="{FF2B5EF4-FFF2-40B4-BE49-F238E27FC236}">
+                <a16:creationId xmlns:a16="http://schemas.microsoft.com/office/drawing/2014/main" id="{EB4118B2-E302-0F6E-1E8C-5FF6D177D487}"/>
+              </a:ext>
+            </a:extLst>
+          </p:cNvPr>
+          <p:cNvSpPr>
+            <a:spLocks noGrp="1"/>
+          </p:cNvSpPr>
+          <p:nvPr>
+            <p:ph type="sldNum" sz="quarter" idx="10"/>
+          </p:nvPr>
+        </p:nvSpPr>
+        <p:spPr/>
+        <p:txBody>
+          <a:bodyPr/>
+          <a:lstStyle/>
+          <a:p>
+            <a:fld id="{BF6F1928-7763-4D19-8FE7-5ACFF015AC24}" type="slidenum">
+              <a:rPr lang="en-US" smtClean="0"/>
+              <a:t>12</a:t>
+            </a:fld>
+            <a:endParaRPr lang="en-US"/>
+          </a:p>
+        </p:txBody>
+      </p:sp>
+    </p:spTree>
+    <p:extLst>
+      <p:ext uri="{BB962C8B-B14F-4D97-AF65-F5344CB8AC3E}">
+        <p14:creationId xmlns:p14="http://schemas.microsoft.com/office/powerpoint/2010/main" val="264192496"/>
+      </p:ext>
+    </p:extLst>
+  </p:cSld>
+  <p:clrMapOvr>
+    <a:masterClrMapping/>
+  </p:clrMapOvr>
+</p:notes>
+</file>
+
+<file path=ppt/notesSlides/notesSlide12.xml><?xml version="1.0" encoding="utf-8"?>
+<p:notes xmlns:a="http://schemas.openxmlformats.org/drawingml/2006/main" xmlns:r="http://schemas.openxmlformats.org/officeDocument/2006/relationships" xmlns:p="http://schemas.openxmlformats.org/presentationml/2006/main">
+  <p:cSld>
+    <p:spTree>
+      <p:nvGrpSpPr>
+        <p:cNvPr id="1" name="">
+          <a:extLst>
+            <a:ext uri="{FF2B5EF4-FFF2-40B4-BE49-F238E27FC236}">
+              <a16:creationId xmlns:a16="http://schemas.microsoft.com/office/drawing/2014/main" id="{61D86348-08B0-9C75-E1CB-D0B25F4835B3}"/>
+            </a:ext>
+          </a:extLst>
+        </p:cNvPr>
+        <p:cNvGrpSpPr/>
+        <p:nvPr/>
+      </p:nvGrpSpPr>
+      <p:grpSpPr>
+        <a:xfrm>
+          <a:off x="0" y="0"/>
+          <a:ext cx="0" cy="0"/>
+          <a:chOff x="0" y="0"/>
+          <a:chExt cx="0" cy="0"/>
+        </a:xfrm>
+      </p:grpSpPr>
+      <p:sp>
+        <p:nvSpPr>
+          <p:cNvPr id="2" name="Образ слайда 1">
+            <a:extLst>
+              <a:ext uri="{FF2B5EF4-FFF2-40B4-BE49-F238E27FC236}">
+                <a16:creationId xmlns:a16="http://schemas.microsoft.com/office/drawing/2014/main" id="{3DB6E15E-98C8-CB7B-5827-947F360ADDF5}"/>
+              </a:ext>
+            </a:extLst>
+          </p:cNvPr>
+          <p:cNvSpPr>
+            <a:spLocks noGrp="1" noRot="1" noChangeAspect="1"/>
+          </p:cNvSpPr>
+          <p:nvPr>
+            <p:ph type="sldImg"/>
+          </p:nvPr>
+        </p:nvSpPr>
+        <p:spPr/>
+      </p:sp>
+      <p:sp>
+        <p:nvSpPr>
+          <p:cNvPr id="3" name="Заметки 2">
+            <a:extLst>
+              <a:ext uri="{FF2B5EF4-FFF2-40B4-BE49-F238E27FC236}">
+                <a16:creationId xmlns:a16="http://schemas.microsoft.com/office/drawing/2014/main" id="{37F3B25D-39C3-9AA9-18D6-E0195D3DDCEE}"/>
+              </a:ext>
+            </a:extLst>
+          </p:cNvPr>
+          <p:cNvSpPr>
+            <a:spLocks noGrp="1"/>
+          </p:cNvSpPr>
+          <p:nvPr>
+            <p:ph type="body" idx="1"/>
+          </p:nvPr>
+        </p:nvSpPr>
+        <p:spPr/>
+        <p:txBody>
+          <a:bodyPr/>
+          <a:lstStyle/>
+          <a:p>
+            <a:endParaRPr lang="ru-RU" dirty="0"/>
+          </a:p>
+        </p:txBody>
+      </p:sp>
+      <p:sp>
+        <p:nvSpPr>
+          <p:cNvPr id="4" name="Номер слайда 3">
+            <a:extLst>
+              <a:ext uri="{FF2B5EF4-FFF2-40B4-BE49-F238E27FC236}">
+                <a16:creationId xmlns:a16="http://schemas.microsoft.com/office/drawing/2014/main" id="{5368E0C5-654B-31DB-5085-53799E4E4506}"/>
+              </a:ext>
+            </a:extLst>
+          </p:cNvPr>
+          <p:cNvSpPr>
+            <a:spLocks noGrp="1"/>
+          </p:cNvSpPr>
+          <p:nvPr>
+            <p:ph type="sldNum" sz="quarter" idx="10"/>
+          </p:nvPr>
+        </p:nvSpPr>
+        <p:spPr/>
+        <p:txBody>
+          <a:bodyPr/>
+          <a:lstStyle/>
+          <a:p>
+            <a:fld id="{BF6F1928-7763-4D19-8FE7-5ACFF015AC24}" type="slidenum">
+              <a:rPr lang="en-US" smtClean="0"/>
+              <a:t>13</a:t>
+            </a:fld>
+            <a:endParaRPr lang="en-US"/>
+          </a:p>
+        </p:txBody>
+      </p:sp>
+    </p:spTree>
+    <p:extLst>
+      <p:ext uri="{BB962C8B-B14F-4D97-AF65-F5344CB8AC3E}">
+        <p14:creationId xmlns:p14="http://schemas.microsoft.com/office/powerpoint/2010/main" val="2398142915"/>
+      </p:ext>
+    </p:extLst>
+  </p:cSld>
+  <p:clrMapOvr>
+    <a:masterClrMapping/>
+  </p:clrMapOvr>
+</p:notes>
+</file>
+
+<file path=ppt/notesSlides/notesSlide13.xml><?xml version="1.0" encoding="utf-8"?>
+<p:notes xmlns:a="http://schemas.openxmlformats.org/drawingml/2006/main" xmlns:r="http://schemas.openxmlformats.org/officeDocument/2006/relationships" xmlns:p="http://schemas.openxmlformats.org/presentationml/2006/main">
+  <p:cSld>
+    <p:spTree>
+      <p:nvGrpSpPr>
+        <p:cNvPr id="1" name="">
+          <a:extLst>
+            <a:ext uri="{FF2B5EF4-FFF2-40B4-BE49-F238E27FC236}">
               <a16:creationId xmlns:a16="http://schemas.microsoft.com/office/drawing/2014/main" id="{9591E552-6268-2CA8-6037-E213387509A4}"/>
             </a:ext>
           </a:extLst>
@@ -6974,7 +7266,7 @@
           <a:p>
             <a:fld id="{BF6F1928-7763-4D19-8FE7-5ACFF015AC24}" type="slidenum">
               <a:rPr lang="en-US" smtClean="0"/>
-              <a:t>11</a:t>
+              <a:t>14</a:t>
             </a:fld>
             <a:endParaRPr lang="en-US"/>
           </a:p>
@@ -6993,7 +7285,115 @@
 </p:notes>
 </file>
 
-<file path=ppt/notesSlides/notesSlide11.xml><?xml version="1.0" encoding="utf-8"?>
+<file path=ppt/notesSlides/notesSlide14.xml><?xml version="1.0" encoding="utf-8"?>
+<p:notes xmlns:a="http://schemas.openxmlformats.org/drawingml/2006/main" xmlns:r="http://schemas.openxmlformats.org/officeDocument/2006/relationships" xmlns:p="http://schemas.openxmlformats.org/presentationml/2006/main">
+  <p:cSld>
+    <p:spTree>
+      <p:nvGrpSpPr>
+        <p:cNvPr id="1" name="">
+          <a:extLst>
+            <a:ext uri="{FF2B5EF4-FFF2-40B4-BE49-F238E27FC236}">
+              <a16:creationId xmlns:a16="http://schemas.microsoft.com/office/drawing/2014/main" id="{9BA1D79C-7E88-480C-9F73-6E40E8BF4349}"/>
+            </a:ext>
+          </a:extLst>
+        </p:cNvPr>
+        <p:cNvGrpSpPr/>
+        <p:nvPr/>
+      </p:nvGrpSpPr>
+      <p:grpSpPr>
+        <a:xfrm>
+          <a:off x="0" y="0"/>
+          <a:ext cx="0" cy="0"/>
+          <a:chOff x="0" y="0"/>
+          <a:chExt cx="0" cy="0"/>
+        </a:xfrm>
+      </p:grpSpPr>
+      <p:sp>
+        <p:nvSpPr>
+          <p:cNvPr id="2" name="Образ слайда 1">
+            <a:extLst>
+              <a:ext uri="{FF2B5EF4-FFF2-40B4-BE49-F238E27FC236}">
+                <a16:creationId xmlns:a16="http://schemas.microsoft.com/office/drawing/2014/main" id="{9D9A9BF6-4A86-EFCF-7A28-14E9E76C6B2B}"/>
+              </a:ext>
+            </a:extLst>
+          </p:cNvPr>
+          <p:cNvSpPr>
+            <a:spLocks noGrp="1" noRot="1" noChangeAspect="1"/>
+          </p:cNvSpPr>
+          <p:nvPr>
+            <p:ph type="sldImg"/>
+          </p:nvPr>
+        </p:nvSpPr>
+        <p:spPr/>
+      </p:sp>
+      <p:sp>
+        <p:nvSpPr>
+          <p:cNvPr id="3" name="Заметки 2">
+            <a:extLst>
+              <a:ext uri="{FF2B5EF4-FFF2-40B4-BE49-F238E27FC236}">
+                <a16:creationId xmlns:a16="http://schemas.microsoft.com/office/drawing/2014/main" id="{767A6197-6149-AFA9-B4A2-20D75A29FDC6}"/>
+              </a:ext>
+            </a:extLst>
+          </p:cNvPr>
+          <p:cNvSpPr>
+            <a:spLocks noGrp="1"/>
+          </p:cNvSpPr>
+          <p:nvPr>
+            <p:ph type="body" idx="1"/>
+          </p:nvPr>
+        </p:nvSpPr>
+        <p:spPr/>
+        <p:txBody>
+          <a:bodyPr/>
+          <a:lstStyle/>
+          <a:p>
+            <a:endParaRPr lang="ru-RU" dirty="0"/>
+          </a:p>
+        </p:txBody>
+      </p:sp>
+      <p:sp>
+        <p:nvSpPr>
+          <p:cNvPr id="4" name="Номер слайда 3">
+            <a:extLst>
+              <a:ext uri="{FF2B5EF4-FFF2-40B4-BE49-F238E27FC236}">
+                <a16:creationId xmlns:a16="http://schemas.microsoft.com/office/drawing/2014/main" id="{F1A19650-BED7-23FC-EF03-305899791C6B}"/>
+              </a:ext>
+            </a:extLst>
+          </p:cNvPr>
+          <p:cNvSpPr>
+            <a:spLocks noGrp="1"/>
+          </p:cNvSpPr>
+          <p:nvPr>
+            <p:ph type="sldNum" sz="quarter" idx="10"/>
+          </p:nvPr>
+        </p:nvSpPr>
+        <p:spPr/>
+        <p:txBody>
+          <a:bodyPr/>
+          <a:lstStyle/>
+          <a:p>
+            <a:fld id="{BF6F1928-7763-4D19-8FE7-5ACFF015AC24}" type="slidenum">
+              <a:rPr lang="en-US" smtClean="0"/>
+              <a:t>15</a:t>
+            </a:fld>
+            <a:endParaRPr lang="en-US"/>
+          </a:p>
+        </p:txBody>
+      </p:sp>
+    </p:spTree>
+    <p:extLst>
+      <p:ext uri="{BB962C8B-B14F-4D97-AF65-F5344CB8AC3E}">
+        <p14:creationId xmlns:p14="http://schemas.microsoft.com/office/powerpoint/2010/main" val="3686257993"/>
+      </p:ext>
+    </p:extLst>
+  </p:cSld>
+  <p:clrMapOvr>
+    <a:masterClrMapping/>
+  </p:clrMapOvr>
+</p:notes>
+</file>
+
+<file path=ppt/notesSlides/notesSlide15.xml><?xml version="1.0" encoding="utf-8"?>
 <p:notes xmlns:a="http://schemas.openxmlformats.org/drawingml/2006/main" xmlns:r="http://schemas.openxmlformats.org/officeDocument/2006/relationships" xmlns:p="http://schemas.openxmlformats.org/presentationml/2006/main">
   <p:cSld>
     <p:spTree>
@@ -7082,7 +7482,7 @@
           <a:p>
             <a:fld id="{BF6F1928-7763-4D19-8FE7-5ACFF015AC24}" type="slidenum">
               <a:rPr lang="en-US" smtClean="0"/>
-              <a:t>12</a:t>
+              <a:t>16</a:t>
             </a:fld>
             <a:endParaRPr lang="en-US"/>
           </a:p>
@@ -7101,7 +7501,115 @@
 </p:notes>
 </file>
 
-<file path=ppt/notesSlides/notesSlide12.xml><?xml version="1.0" encoding="utf-8"?>
+<file path=ppt/notesSlides/notesSlide16.xml><?xml version="1.0" encoding="utf-8"?>
+<p:notes xmlns:a="http://schemas.openxmlformats.org/drawingml/2006/main" xmlns:r="http://schemas.openxmlformats.org/officeDocument/2006/relationships" xmlns:p="http://schemas.openxmlformats.org/presentationml/2006/main">
+  <p:cSld>
+    <p:spTree>
+      <p:nvGrpSpPr>
+        <p:cNvPr id="1" name="">
+          <a:extLst>
+            <a:ext uri="{FF2B5EF4-FFF2-40B4-BE49-F238E27FC236}">
+              <a16:creationId xmlns:a16="http://schemas.microsoft.com/office/drawing/2014/main" id="{59284BDB-C613-071B-2CB4-6528D1C47688}"/>
+            </a:ext>
+          </a:extLst>
+        </p:cNvPr>
+        <p:cNvGrpSpPr/>
+        <p:nvPr/>
+      </p:nvGrpSpPr>
+      <p:grpSpPr>
+        <a:xfrm>
+          <a:off x="0" y="0"/>
+          <a:ext cx="0" cy="0"/>
+          <a:chOff x="0" y="0"/>
+          <a:chExt cx="0" cy="0"/>
+        </a:xfrm>
+      </p:grpSpPr>
+      <p:sp>
+        <p:nvSpPr>
+          <p:cNvPr id="2" name="Образ слайда 1">
+            <a:extLst>
+              <a:ext uri="{FF2B5EF4-FFF2-40B4-BE49-F238E27FC236}">
+                <a16:creationId xmlns:a16="http://schemas.microsoft.com/office/drawing/2014/main" id="{B7EB3C9E-3971-4188-7EA1-E9A90E081FA6}"/>
+              </a:ext>
+            </a:extLst>
+          </p:cNvPr>
+          <p:cNvSpPr>
+            <a:spLocks noGrp="1" noRot="1" noChangeAspect="1"/>
+          </p:cNvSpPr>
+          <p:nvPr>
+            <p:ph type="sldImg"/>
+          </p:nvPr>
+        </p:nvSpPr>
+        <p:spPr/>
+      </p:sp>
+      <p:sp>
+        <p:nvSpPr>
+          <p:cNvPr id="3" name="Заметки 2">
+            <a:extLst>
+              <a:ext uri="{FF2B5EF4-FFF2-40B4-BE49-F238E27FC236}">
+                <a16:creationId xmlns:a16="http://schemas.microsoft.com/office/drawing/2014/main" id="{B1C6F392-0820-703A-12A5-9D9C2B3C9B00}"/>
+              </a:ext>
+            </a:extLst>
+          </p:cNvPr>
+          <p:cNvSpPr>
+            <a:spLocks noGrp="1"/>
+          </p:cNvSpPr>
+          <p:nvPr>
+            <p:ph type="body" idx="1"/>
+          </p:nvPr>
+        </p:nvSpPr>
+        <p:spPr/>
+        <p:txBody>
+          <a:bodyPr/>
+          <a:lstStyle/>
+          <a:p>
+            <a:endParaRPr lang="ru-RU" dirty="0"/>
+          </a:p>
+        </p:txBody>
+      </p:sp>
+      <p:sp>
+        <p:nvSpPr>
+          <p:cNvPr id="4" name="Номер слайда 3">
+            <a:extLst>
+              <a:ext uri="{FF2B5EF4-FFF2-40B4-BE49-F238E27FC236}">
+                <a16:creationId xmlns:a16="http://schemas.microsoft.com/office/drawing/2014/main" id="{02F94817-53A2-2391-D276-EA7883093053}"/>
+              </a:ext>
+            </a:extLst>
+          </p:cNvPr>
+          <p:cNvSpPr>
+            <a:spLocks noGrp="1"/>
+          </p:cNvSpPr>
+          <p:nvPr>
+            <p:ph type="sldNum" sz="quarter" idx="10"/>
+          </p:nvPr>
+        </p:nvSpPr>
+        <p:spPr/>
+        <p:txBody>
+          <a:bodyPr/>
+          <a:lstStyle/>
+          <a:p>
+            <a:fld id="{BF6F1928-7763-4D19-8FE7-5ACFF015AC24}" type="slidenum">
+              <a:rPr lang="en-US" smtClean="0"/>
+              <a:t>17</a:t>
+            </a:fld>
+            <a:endParaRPr lang="en-US"/>
+          </a:p>
+        </p:txBody>
+      </p:sp>
+    </p:spTree>
+    <p:extLst>
+      <p:ext uri="{BB962C8B-B14F-4D97-AF65-F5344CB8AC3E}">
+        <p14:creationId xmlns:p14="http://schemas.microsoft.com/office/powerpoint/2010/main" val="2378884730"/>
+      </p:ext>
+    </p:extLst>
+  </p:cSld>
+  <p:clrMapOvr>
+    <a:masterClrMapping/>
+  </p:clrMapOvr>
+</p:notes>
+</file>
+
+<file path=ppt/notesSlides/notesSlide17.xml><?xml version="1.0" encoding="utf-8"?>
 <p:notes xmlns:a="http://schemas.openxmlformats.org/drawingml/2006/main" xmlns:r="http://schemas.openxmlformats.org/officeDocument/2006/relationships" xmlns:p="http://schemas.openxmlformats.org/presentationml/2006/main">
   <p:cSld>
     <p:spTree>
@@ -7190,7 +7698,7 @@
           <a:p>
             <a:fld id="{BF6F1928-7763-4D19-8FE7-5ACFF015AC24}" type="slidenum">
               <a:rPr lang="en-US" smtClean="0"/>
-              <a:t>13</a:t>
+              <a:t>18</a:t>
             </a:fld>
             <a:endParaRPr lang="en-US"/>
           </a:p>
@@ -7209,7 +7717,7 @@
 </p:notes>
 </file>
 
-<file path=ppt/notesSlides/notesSlide13.xml><?xml version="1.0" encoding="utf-8"?>
+<file path=ppt/notesSlides/notesSlide18.xml><?xml version="1.0" encoding="utf-8"?>
 <p:notes xmlns:a="http://schemas.openxmlformats.org/drawingml/2006/main" xmlns:r="http://schemas.openxmlformats.org/officeDocument/2006/relationships" xmlns:p="http://schemas.openxmlformats.org/presentationml/2006/main">
   <p:cSld>
     <p:spTree>
@@ -7298,7 +7806,7 @@
           <a:p>
             <a:fld id="{BF6F1928-7763-4D19-8FE7-5ACFF015AC24}" type="slidenum">
               <a:rPr lang="en-US" smtClean="0"/>
-              <a:t>14</a:t>
+              <a:t>19</a:t>
             </a:fld>
             <a:endParaRPr lang="en-US"/>
           </a:p>
@@ -8081,7 +8589,7 @@
         <p:cNvPr id="1" name="">
           <a:extLst>
             <a:ext uri="{FF2B5EF4-FFF2-40B4-BE49-F238E27FC236}">
-              <a16:creationId xmlns:a16="http://schemas.microsoft.com/office/drawing/2014/main" id="{C7DA9331-7E3D-D4D3-588F-6B9DD7074567}"/>
+              <a16:creationId xmlns:a16="http://schemas.microsoft.com/office/drawing/2014/main" id="{EC6D7261-5052-FBD2-44F5-6CF5AD88A6BA}"/>
             </a:ext>
           </a:extLst>
         </p:cNvPr>
@@ -8101,7 +8609,7 @@
           <p:cNvPr id="2" name="Образ слайда 1">
             <a:extLst>
               <a:ext uri="{FF2B5EF4-FFF2-40B4-BE49-F238E27FC236}">
-                <a16:creationId xmlns:a16="http://schemas.microsoft.com/office/drawing/2014/main" id="{B59E5573-1958-E69A-55C5-009C1787664B}"/>
+                <a16:creationId xmlns:a16="http://schemas.microsoft.com/office/drawing/2014/main" id="{CA2149A2-C5CF-7098-75B9-08405D13EC84}"/>
               </a:ext>
             </a:extLst>
           </p:cNvPr>
@@ -8119,7 +8627,7 @@
           <p:cNvPr id="3" name="Заметки 2">
             <a:extLst>
               <a:ext uri="{FF2B5EF4-FFF2-40B4-BE49-F238E27FC236}">
-                <a16:creationId xmlns:a16="http://schemas.microsoft.com/office/drawing/2014/main" id="{0EEF5F34-0B90-DE41-92FF-3568E40CA1DC}"/>
+                <a16:creationId xmlns:a16="http://schemas.microsoft.com/office/drawing/2014/main" id="{FB37772B-5162-1393-DA3F-D12BE77FEFFD}"/>
               </a:ext>
             </a:extLst>
           </p:cNvPr>
@@ -8144,7 +8652,7 @@
           <p:cNvPr id="4" name="Номер слайда 3">
             <a:extLst>
               <a:ext uri="{FF2B5EF4-FFF2-40B4-BE49-F238E27FC236}">
-                <a16:creationId xmlns:a16="http://schemas.microsoft.com/office/drawing/2014/main" id="{EB4118B2-E302-0F6E-1E8C-5FF6D177D487}"/>
+                <a16:creationId xmlns:a16="http://schemas.microsoft.com/office/drawing/2014/main" id="{67D1915D-B1A0-758D-771F-DA845AD8B77B}"/>
               </a:ext>
             </a:extLst>
           </p:cNvPr>
@@ -8171,7 +8679,7 @@
     </p:spTree>
     <p:extLst>
       <p:ext uri="{BB962C8B-B14F-4D97-AF65-F5344CB8AC3E}">
-        <p14:creationId xmlns:p14="http://schemas.microsoft.com/office/powerpoint/2010/main" val="264192496"/>
+        <p14:creationId xmlns:p14="http://schemas.microsoft.com/office/powerpoint/2010/main" val="2299480594"/>
       </p:ext>
     </p:extLst>
   </p:cSld>
@@ -8328,7 +8836,7 @@
           <a:p>
             <a:fld id="{7D041A35-9E0E-854D-AA68-667636D6212A}" type="datetimeFigureOut">
               <a:rPr lang="ru-RU" smtClean="0"/>
-              <a:t>04.06.2026</a:t>
+              <a:t>07.06.2026</a:t>
             </a:fld>
             <a:endParaRPr lang="ru-RU"/>
           </a:p>
@@ -8526,7 +9034,7 @@
           <a:p>
             <a:fld id="{7D041A35-9E0E-854D-AA68-667636D6212A}" type="datetimeFigureOut">
               <a:rPr lang="ru-RU" smtClean="0"/>
-              <a:t>04.06.2026</a:t>
+              <a:t>07.06.2026</a:t>
             </a:fld>
             <a:endParaRPr lang="ru-RU"/>
           </a:p>
@@ -8734,7 +9242,7 @@
           <a:p>
             <a:fld id="{7D041A35-9E0E-854D-AA68-667636D6212A}" type="datetimeFigureOut">
               <a:rPr lang="ru-RU" smtClean="0"/>
-              <a:t>04.06.2026</a:t>
+              <a:t>07.06.2026</a:t>
             </a:fld>
             <a:endParaRPr lang="ru-RU"/>
           </a:p>
@@ -8932,7 +9440,7 @@
           <a:p>
             <a:fld id="{7D041A35-9E0E-854D-AA68-667636D6212A}" type="datetimeFigureOut">
               <a:rPr lang="ru-RU" smtClean="0"/>
-              <a:t>04.06.2026</a:t>
+              <a:t>07.06.2026</a:t>
             </a:fld>
             <a:endParaRPr lang="ru-RU"/>
           </a:p>
@@ -9207,7 +9715,7 @@
           <a:p>
             <a:fld id="{7D041A35-9E0E-854D-AA68-667636D6212A}" type="datetimeFigureOut">
               <a:rPr lang="ru-RU" smtClean="0"/>
-              <a:t>04.06.2026</a:t>
+              <a:t>07.06.2026</a:t>
             </a:fld>
             <a:endParaRPr lang="ru-RU"/>
           </a:p>
@@ -9472,7 +9980,7 @@
           <a:p>
             <a:fld id="{7D041A35-9E0E-854D-AA68-667636D6212A}" type="datetimeFigureOut">
               <a:rPr lang="ru-RU" smtClean="0"/>
-              <a:t>04.06.2026</a:t>
+              <a:t>07.06.2026</a:t>
             </a:fld>
             <a:endParaRPr lang="ru-RU"/>
           </a:p>
@@ -9884,7 +10392,7 @@
           <a:p>
             <a:fld id="{7D041A35-9E0E-854D-AA68-667636D6212A}" type="datetimeFigureOut">
               <a:rPr lang="ru-RU" smtClean="0"/>
-              <a:t>04.06.2026</a:t>
+              <a:t>07.06.2026</a:t>
             </a:fld>
             <a:endParaRPr lang="ru-RU"/>
           </a:p>
@@ -10025,7 +10533,7 @@
           <a:p>
             <a:fld id="{7D041A35-9E0E-854D-AA68-667636D6212A}" type="datetimeFigureOut">
               <a:rPr lang="ru-RU" smtClean="0"/>
-              <a:t>04.06.2026</a:t>
+              <a:t>07.06.2026</a:t>
             </a:fld>
             <a:endParaRPr lang="ru-RU"/>
           </a:p>
@@ -10138,7 +10646,7 @@
           <a:p>
             <a:fld id="{7D041A35-9E0E-854D-AA68-667636D6212A}" type="datetimeFigureOut">
               <a:rPr lang="ru-RU" smtClean="0"/>
-              <a:t>04.06.2026</a:t>
+              <a:t>07.06.2026</a:t>
             </a:fld>
             <a:endParaRPr lang="ru-RU"/>
           </a:p>
@@ -10449,7 +10957,7 @@
           <a:p>
             <a:fld id="{7D041A35-9E0E-854D-AA68-667636D6212A}" type="datetimeFigureOut">
               <a:rPr lang="ru-RU" smtClean="0"/>
-              <a:t>04.06.2026</a:t>
+              <a:t>07.06.2026</a:t>
             </a:fld>
             <a:endParaRPr lang="ru-RU"/>
           </a:p>
@@ -10737,7 +11245,7 @@
           <a:p>
             <a:fld id="{7D041A35-9E0E-854D-AA68-667636D6212A}" type="datetimeFigureOut">
               <a:rPr lang="ru-RU" smtClean="0"/>
-              <a:t>04.06.2026</a:t>
+              <a:t>07.06.2026</a:t>
             </a:fld>
             <a:endParaRPr lang="ru-RU"/>
           </a:p>
@@ -10987,7 +11495,7 @@
           <a:p>
             <a:fld id="{7D041A35-9E0E-854D-AA68-667636D6212A}" type="datetimeFigureOut">
               <a:rPr lang="ru-RU" smtClean="0"/>
-              <a:t>04.06.2026</a:t>
+              <a:t>07.06.2026</a:t>
             </a:fld>
             <a:endParaRPr lang="ru-RU"/>
           </a:p>
@@ -11468,7 +11976,7 @@
         <p:spPr>
           <a:xfrm>
             <a:off x="300037" y="5500187"/>
-            <a:ext cx="7192097" cy="1200329"/>
+            <a:ext cx="5750420" cy="830997"/>
           </a:xfrm>
           <a:prstGeom prst="rect">
             <a:avLst/>
@@ -11493,21 +12001,8 @@
                 <a:ea typeface="Inter Variable Text" panose="02000503000000020004" pitchFamily="2" charset="0"/>
                 <a:cs typeface="Times New Roman" panose="02020603050405020304" pitchFamily="18" charset="0"/>
               </a:rPr>
-              <a:t>Студент группы ЭМС-271 Гамов Павел Антонович</a:t>
+              <a:t>Студент гр.: ЭМС-271, Гамов П.А.</a:t>
             </a:r>
-          </a:p>
-          <a:p>
-            <a:endParaRPr lang="ru-RU" sz="2400" dirty="0">
-              <a:solidFill>
-                <a:schemeClr val="tx1">
-                  <a:lumMod val="65000"/>
-                  <a:lumOff val="35000"/>
-                </a:schemeClr>
-              </a:solidFill>
-              <a:latin typeface="Times New Roman" panose="02020603050405020304" pitchFamily="18" charset="0"/>
-              <a:ea typeface="Inter Variable Text" panose="02000503000000020004" pitchFamily="2" charset="0"/>
-              <a:cs typeface="Times New Roman" panose="02020603050405020304" pitchFamily="18" charset="0"/>
-            </a:endParaRPr>
           </a:p>
           <a:p>
             <a:r>
@@ -11522,7 +12017,35 @@
                 <a:ea typeface="Inter Variable Text" panose="02000503000000020004" pitchFamily="2" charset="0"/>
                 <a:cs typeface="Times New Roman" panose="02020603050405020304" pitchFamily="18" charset="0"/>
               </a:rPr>
-              <a:t>Научный руководитель Демидов Андрей Викторович</a:t>
+              <a:t>Научный рук-ль: к.э.н. </a:t>
+            </a:r>
+            <a:r>
+              <a:rPr lang="ru-RU" sz="2400">
+                <a:solidFill>
+                  <a:schemeClr val="tx1">
+                    <a:lumMod val="65000"/>
+                    <a:lumOff val="35000"/>
+                  </a:schemeClr>
+                </a:solidFill>
+                <a:latin typeface="Times New Roman" panose="02020603050405020304" pitchFamily="18" charset="0"/>
+                <a:ea typeface="Inter Variable Text" panose="02000503000000020004" pitchFamily="2" charset="0"/>
+                <a:cs typeface="Times New Roman" panose="02020603050405020304" pitchFamily="18" charset="0"/>
+              </a:rPr>
+              <a:t>доц., </a:t>
+            </a:r>
+            <a:r>
+              <a:rPr lang="ru-RU" sz="2400" dirty="0">
+                <a:solidFill>
+                  <a:schemeClr val="tx1">
+                    <a:lumMod val="65000"/>
+                    <a:lumOff val="35000"/>
+                  </a:schemeClr>
+                </a:solidFill>
+                <a:latin typeface="Times New Roman" panose="02020603050405020304" pitchFamily="18" charset="0"/>
+                <a:ea typeface="Inter Variable Text" panose="02000503000000020004" pitchFamily="2" charset="0"/>
+                <a:cs typeface="Times New Roman" panose="02020603050405020304" pitchFamily="18" charset="0"/>
+              </a:rPr>
+              <a:t>Демидов А.В.</a:t>
             </a:r>
           </a:p>
         </p:txBody>
@@ -12000,6 +12523,2362 @@
 
 <file path=ppt/slides/slide10.xml><?xml version="1.0" encoding="utf-8"?>
 <p:sld xmlns:a="http://schemas.openxmlformats.org/drawingml/2006/main" xmlns:r="http://schemas.openxmlformats.org/officeDocument/2006/relationships" xmlns:p="http://schemas.openxmlformats.org/presentationml/2006/main">
+  <p:cSld>
+    <p:spTree>
+      <p:nvGrpSpPr>
+        <p:cNvPr id="1" name="">
+          <a:extLst>
+            <a:ext uri="{FF2B5EF4-FFF2-40B4-BE49-F238E27FC236}">
+              <a16:creationId xmlns:a16="http://schemas.microsoft.com/office/drawing/2014/main" id="{12DB03CA-3523-1A18-2D55-0B30DE147913}"/>
+            </a:ext>
+          </a:extLst>
+        </p:cNvPr>
+        <p:cNvGrpSpPr/>
+        <p:nvPr/>
+      </p:nvGrpSpPr>
+      <p:grpSpPr>
+        <a:xfrm>
+          <a:off x="0" y="0"/>
+          <a:ext cx="0" cy="0"/>
+          <a:chOff x="0" y="0"/>
+          <a:chExt cx="0" cy="0"/>
+        </a:xfrm>
+      </p:grpSpPr>
+      <p:sp>
+        <p:nvSpPr>
+          <p:cNvPr id="6" name="TextBox 5">
+            <a:extLst>
+              <a:ext uri="{FF2B5EF4-FFF2-40B4-BE49-F238E27FC236}">
+                <a16:creationId xmlns:a16="http://schemas.microsoft.com/office/drawing/2014/main" id="{AB0F1ACB-0218-438B-5D99-C5FD47847227}"/>
+              </a:ext>
+            </a:extLst>
+          </p:cNvPr>
+          <p:cNvSpPr txBox="1"/>
+          <p:nvPr/>
+        </p:nvSpPr>
+        <p:spPr>
+          <a:xfrm>
+            <a:off x="3784600" y="273858"/>
+            <a:ext cx="8107363" cy="646331"/>
+          </a:xfrm>
+          <a:prstGeom prst="rect">
+            <a:avLst/>
+          </a:prstGeom>
+          <a:noFill/>
+        </p:spPr>
+        <p:txBody>
+          <a:bodyPr wrap="square" rtlCol="0">
+            <a:spAutoFit/>
+          </a:bodyPr>
+          <a:lstStyle/>
+          <a:p>
+            <a:r>
+              <a:rPr lang="ru-RU" sz="3600" dirty="0">
+                <a:solidFill>
+                  <a:srgbClr val="274E9C"/>
+                </a:solidFill>
+                <a:latin typeface="Inter Variable Text Medium" panose="02000503000000020004" pitchFamily="2" charset="0"/>
+                <a:ea typeface="Inter Variable Text Medium" panose="02000503000000020004" pitchFamily="2" charset="0"/>
+                <a:cs typeface="Inter Variable Text Medium" panose="02000503000000020004" pitchFamily="2" charset="0"/>
+              </a:rPr>
+              <a:t>Пример работы модуля привычек</a:t>
+            </a:r>
+          </a:p>
+        </p:txBody>
+      </p:sp>
+      <p:pic>
+        <p:nvPicPr>
+          <p:cNvPr id="2" name="Рисунок 1">
+            <a:extLst>
+              <a:ext uri="{FF2B5EF4-FFF2-40B4-BE49-F238E27FC236}">
+                <a16:creationId xmlns:a16="http://schemas.microsoft.com/office/drawing/2014/main" id="{15E0BCAC-BE42-E97D-C25C-248A840DDECD}"/>
+              </a:ext>
+            </a:extLst>
+          </p:cNvPr>
+          <p:cNvPicPr>
+            <a:picLocks noChangeAspect="1"/>
+          </p:cNvPicPr>
+          <p:nvPr/>
+        </p:nvPicPr>
+        <p:blipFill>
+          <a:blip r:embed="rId3"/>
+          <a:stretch>
+            <a:fillRect/>
+          </a:stretch>
+        </p:blipFill>
+        <p:spPr>
+          <a:xfrm>
+            <a:off x="300037" y="273858"/>
+            <a:ext cx="2990861" cy="640543"/>
+          </a:xfrm>
+          <a:prstGeom prst="rect">
+            <a:avLst/>
+          </a:prstGeom>
+        </p:spPr>
+      </p:pic>
+      <p:grpSp>
+        <p:nvGrpSpPr>
+          <p:cNvPr id="15" name="Группа 14">
+            <a:extLst>
+              <a:ext uri="{FF2B5EF4-FFF2-40B4-BE49-F238E27FC236}">
+                <a16:creationId xmlns:a16="http://schemas.microsoft.com/office/drawing/2014/main" id="{1459F97F-93EE-9443-C11D-A887C92C78A9}"/>
+              </a:ext>
+            </a:extLst>
+          </p:cNvPr>
+          <p:cNvGrpSpPr/>
+          <p:nvPr/>
+        </p:nvGrpSpPr>
+        <p:grpSpPr>
+          <a:xfrm>
+            <a:off x="11641128" y="6312477"/>
+            <a:ext cx="490760" cy="490760"/>
+            <a:chOff x="11383518" y="6084717"/>
+            <a:chExt cx="618259" cy="618259"/>
+          </a:xfrm>
+        </p:grpSpPr>
+        <p:sp>
+          <p:nvSpPr>
+            <p:cNvPr id="16" name="Прямоугольник: скругленные углы 15">
+              <a:extLst>
+                <a:ext uri="{FF2B5EF4-FFF2-40B4-BE49-F238E27FC236}">
+                  <a16:creationId xmlns:a16="http://schemas.microsoft.com/office/drawing/2014/main" id="{9CF11389-EF33-5EC9-97E9-EE1816D928F5}"/>
+                </a:ext>
+              </a:extLst>
+            </p:cNvPr>
+            <p:cNvSpPr/>
+            <p:nvPr/>
+          </p:nvSpPr>
+          <p:spPr>
+            <a:xfrm>
+              <a:off x="11383518" y="6084717"/>
+              <a:ext cx="618259" cy="618259"/>
+            </a:xfrm>
+            <a:prstGeom prst="roundRect">
+              <a:avLst/>
+            </a:prstGeom>
+            <a:solidFill>
+              <a:srgbClr val="1A3773"/>
+            </a:solidFill>
+            <a:ln>
+              <a:solidFill>
+                <a:srgbClr val="1A3773"/>
+              </a:solidFill>
+            </a:ln>
+          </p:spPr>
+          <p:style>
+            <a:lnRef idx="2">
+              <a:schemeClr val="accent1">
+                <a:shade val="15000"/>
+              </a:schemeClr>
+            </a:lnRef>
+            <a:fillRef idx="1">
+              <a:schemeClr val="accent1"/>
+            </a:fillRef>
+            <a:effectRef idx="0">
+              <a:schemeClr val="accent1"/>
+            </a:effectRef>
+            <a:fontRef idx="minor">
+              <a:schemeClr val="lt1"/>
+            </a:fontRef>
+          </p:style>
+          <p:txBody>
+            <a:bodyPr rtlCol="0" anchor="ctr"/>
+            <a:lstStyle/>
+            <a:p>
+              <a:pPr algn="ctr"/>
+              <a:endParaRPr lang="en-US"/>
+            </a:p>
+          </p:txBody>
+        </p:sp>
+        <p:sp>
+          <p:nvSpPr>
+            <p:cNvPr id="17" name="TextBox 16">
+              <a:extLst>
+                <a:ext uri="{FF2B5EF4-FFF2-40B4-BE49-F238E27FC236}">
+                  <a16:creationId xmlns:a16="http://schemas.microsoft.com/office/drawing/2014/main" id="{134285FE-B8C9-586B-2D20-42FA80501AC5}"/>
+                </a:ext>
+              </a:extLst>
+            </p:cNvPr>
+            <p:cNvSpPr txBox="1"/>
+            <p:nvPr/>
+          </p:nvSpPr>
+          <p:spPr>
+            <a:xfrm>
+              <a:off x="11508348" y="6199977"/>
+              <a:ext cx="368600" cy="387737"/>
+            </a:xfrm>
+            <a:prstGeom prst="rect">
+              <a:avLst/>
+            </a:prstGeom>
+            <a:noFill/>
+          </p:spPr>
+          <p:txBody>
+            <a:bodyPr wrap="square" rtlCol="0">
+              <a:spAutoFit/>
+            </a:bodyPr>
+            <a:lstStyle/>
+            <a:p>
+              <a:pPr algn="ctr"/>
+              <a:r>
+                <a:rPr lang="ru-RU" sz="1400" dirty="0">
+                  <a:solidFill>
+                    <a:schemeClr val="bg1"/>
+                  </a:solidFill>
+                  <a:latin typeface="Inter Variable Text" panose="02000503000000020004" pitchFamily="2" charset="0"/>
+                  <a:ea typeface="Inter Variable Text" panose="02000503000000020004" pitchFamily="2" charset="0"/>
+                  <a:cs typeface="Inter Variable Text" panose="02000503000000020004" pitchFamily="2" charset="0"/>
+                </a:rPr>
+                <a:t>8</a:t>
+              </a:r>
+              <a:endParaRPr lang="en-US" sz="1400" dirty="0">
+                <a:solidFill>
+                  <a:schemeClr val="bg1"/>
+                </a:solidFill>
+                <a:latin typeface="Inter Variable Text" panose="02000503000000020004" pitchFamily="2" charset="0"/>
+                <a:ea typeface="Inter Variable Text" panose="02000503000000020004" pitchFamily="2" charset="0"/>
+                <a:cs typeface="Inter Variable Text" panose="02000503000000020004" pitchFamily="2" charset="0"/>
+              </a:endParaRPr>
+            </a:p>
+          </p:txBody>
+        </p:sp>
+      </p:grpSp>
+      <p:pic>
+        <p:nvPicPr>
+          <p:cNvPr id="3" name="Рисунок 2">
+            <a:extLst>
+              <a:ext uri="{FF2B5EF4-FFF2-40B4-BE49-F238E27FC236}">
+                <a16:creationId xmlns:a16="http://schemas.microsoft.com/office/drawing/2014/main" id="{733EB076-0723-D7FB-9FB3-905E5AC5E8A4}"/>
+              </a:ext>
+            </a:extLst>
+          </p:cNvPr>
+          <p:cNvPicPr>
+            <a:picLocks noChangeAspect="1"/>
+          </p:cNvPicPr>
+          <p:nvPr/>
+        </p:nvPicPr>
+        <p:blipFill>
+          <a:blip r:embed="rId4"/>
+          <a:stretch>
+            <a:fillRect/>
+          </a:stretch>
+        </p:blipFill>
+        <p:spPr bwMode="auto">
+          <a:xfrm>
+            <a:off x="542543" y="1105794"/>
+            <a:ext cx="4222607" cy="3536681"/>
+          </a:xfrm>
+          <a:prstGeom prst="rect">
+            <a:avLst/>
+          </a:prstGeom>
+          <a:noFill/>
+        </p:spPr>
+      </p:pic>
+      <p:pic>
+        <p:nvPicPr>
+          <p:cNvPr id="4" name="Рисунок 3">
+            <a:extLst>
+              <a:ext uri="{FF2B5EF4-FFF2-40B4-BE49-F238E27FC236}">
+                <a16:creationId xmlns:a16="http://schemas.microsoft.com/office/drawing/2014/main" id="{BC21D49F-B2C1-0846-FD3C-A94F60560611}"/>
+              </a:ext>
+            </a:extLst>
+          </p:cNvPr>
+          <p:cNvPicPr>
+            <a:picLocks noChangeAspect="1"/>
+          </p:cNvPicPr>
+          <p:nvPr/>
+        </p:nvPicPr>
+        <p:blipFill>
+          <a:blip r:embed="rId5"/>
+          <a:stretch>
+            <a:fillRect/>
+          </a:stretch>
+        </p:blipFill>
+        <p:spPr bwMode="auto">
+          <a:xfrm>
+            <a:off x="542542" y="4914421"/>
+            <a:ext cx="4222607" cy="1287837"/>
+          </a:xfrm>
+          <a:prstGeom prst="rect">
+            <a:avLst/>
+          </a:prstGeom>
+          <a:noFill/>
+        </p:spPr>
+      </p:pic>
+      <p:pic>
+        <p:nvPicPr>
+          <p:cNvPr id="8" name="Рисунок 7">
+            <a:extLst>
+              <a:ext uri="{FF2B5EF4-FFF2-40B4-BE49-F238E27FC236}">
+                <a16:creationId xmlns:a16="http://schemas.microsoft.com/office/drawing/2014/main" id="{0387F770-1860-74EA-780C-228C0150DF8D}"/>
+              </a:ext>
+            </a:extLst>
+          </p:cNvPr>
+          <p:cNvPicPr>
+            <a:picLocks noChangeAspect="1"/>
+          </p:cNvPicPr>
+          <p:nvPr/>
+        </p:nvPicPr>
+        <p:blipFill>
+          <a:blip r:embed="rId6"/>
+          <a:stretch>
+            <a:fillRect/>
+          </a:stretch>
+        </p:blipFill>
+        <p:spPr bwMode="auto">
+          <a:xfrm>
+            <a:off x="5859888" y="1140137"/>
+            <a:ext cx="4215684" cy="2243268"/>
+          </a:xfrm>
+          <a:prstGeom prst="rect">
+            <a:avLst/>
+          </a:prstGeom>
+          <a:noFill/>
+        </p:spPr>
+      </p:pic>
+      <p:pic>
+        <p:nvPicPr>
+          <p:cNvPr id="9" name="Рисунок 8">
+            <a:extLst>
+              <a:ext uri="{FF2B5EF4-FFF2-40B4-BE49-F238E27FC236}">
+                <a16:creationId xmlns:a16="http://schemas.microsoft.com/office/drawing/2014/main" id="{86CD8D3B-47B9-5847-46B2-C4E648547ED1}"/>
+              </a:ext>
+            </a:extLst>
+          </p:cNvPr>
+          <p:cNvPicPr>
+            <a:picLocks noChangeAspect="1"/>
+          </p:cNvPicPr>
+          <p:nvPr/>
+        </p:nvPicPr>
+        <p:blipFill>
+          <a:blip r:embed="rId7"/>
+          <a:stretch>
+            <a:fillRect/>
+          </a:stretch>
+        </p:blipFill>
+        <p:spPr bwMode="auto">
+          <a:xfrm>
+            <a:off x="5551542" y="4007642"/>
+            <a:ext cx="5042452" cy="1970467"/>
+          </a:xfrm>
+          <a:prstGeom prst="rect">
+            <a:avLst/>
+          </a:prstGeom>
+          <a:noFill/>
+        </p:spPr>
+      </p:pic>
+      <p:sp>
+        <p:nvSpPr>
+          <p:cNvPr id="5" name="Объект 2">
+            <a:extLst>
+              <a:ext uri="{FF2B5EF4-FFF2-40B4-BE49-F238E27FC236}">
+                <a16:creationId xmlns:a16="http://schemas.microsoft.com/office/drawing/2014/main" id="{1BEFB24A-7741-9A8A-0F47-AD3B4924EF7D}"/>
+              </a:ext>
+            </a:extLst>
+          </p:cNvPr>
+          <p:cNvSpPr txBox="1">
+            <a:spLocks/>
+          </p:cNvSpPr>
+          <p:nvPr/>
+        </p:nvSpPr>
+        <p:spPr>
+          <a:xfrm>
+            <a:off x="300037" y="1017431"/>
+            <a:ext cx="4707093" cy="3666605"/>
+          </a:xfrm>
+          <a:prstGeom prst="roundRect">
+            <a:avLst>
+              <a:gd name="adj" fmla="val 4817"/>
+            </a:avLst>
+          </a:prstGeom>
+          <a:ln w="12700">
+            <a:solidFill>
+              <a:srgbClr val="1A3773"/>
+            </a:solidFill>
+            <a:prstDash val="dash"/>
+          </a:ln>
+        </p:spPr>
+        <p:txBody>
+          <a:bodyPr anchor="ctr"/>
+          <a:lstStyle>
+            <a:lvl1pPr marL="0" indent="0" algn="ctr" defTabSz="914400" rtl="0" eaLnBrk="1" latinLnBrk="0" hangingPunct="1">
+              <a:lnSpc>
+                <a:spcPct val="90000"/>
+              </a:lnSpc>
+              <a:spcBef>
+                <a:spcPts val="1000"/>
+              </a:spcBef>
+              <a:buFont typeface="Arial"/>
+              <a:buNone/>
+              <a:defRPr sz="2800" b="0" i="0" kern="1200">
+                <a:solidFill>
+                  <a:schemeClr val="tx1">
+                    <a:lumMod val="85000"/>
+                    <a:lumOff val="15000"/>
+                  </a:schemeClr>
+                </a:solidFill>
+                <a:latin typeface="+mn-lt"/>
+                <a:ea typeface="Open Sans Light" charset="0"/>
+                <a:cs typeface="Open Sans Light" charset="0"/>
+              </a:defRPr>
+            </a:lvl1pPr>
+            <a:lvl2pPr marL="685800" indent="-228600" algn="l" defTabSz="914400" rtl="0" eaLnBrk="1" latinLnBrk="0" hangingPunct="1">
+              <a:lnSpc>
+                <a:spcPct val="90000"/>
+              </a:lnSpc>
+              <a:spcBef>
+                <a:spcPts val="500"/>
+              </a:spcBef>
+              <a:buFont typeface="Arial"/>
+              <a:buChar char="•"/>
+              <a:defRPr sz="2400" b="0" i="0" kern="1200">
+                <a:solidFill>
+                  <a:schemeClr val="tx1"/>
+                </a:solidFill>
+                <a:latin typeface="+mn-lt"/>
+                <a:ea typeface="Open Sans Light" charset="0"/>
+                <a:cs typeface="Open Sans Light" charset="0"/>
+              </a:defRPr>
+            </a:lvl2pPr>
+            <a:lvl3pPr marL="1143000" indent="-228600" algn="l" defTabSz="914400" rtl="0" eaLnBrk="1" latinLnBrk="0" hangingPunct="1">
+              <a:lnSpc>
+                <a:spcPct val="90000"/>
+              </a:lnSpc>
+              <a:spcBef>
+                <a:spcPts val="500"/>
+              </a:spcBef>
+              <a:buFont typeface="Arial"/>
+              <a:buChar char="•"/>
+              <a:defRPr sz="2000" b="0" i="0" kern="1200">
+                <a:solidFill>
+                  <a:schemeClr val="tx1"/>
+                </a:solidFill>
+                <a:latin typeface="+mn-lt"/>
+                <a:ea typeface="Open Sans Light" charset="0"/>
+                <a:cs typeface="Open Sans Light" charset="0"/>
+              </a:defRPr>
+            </a:lvl3pPr>
+            <a:lvl4pPr marL="1600200" indent="-228600" algn="l" defTabSz="914400" rtl="0" eaLnBrk="1" latinLnBrk="0" hangingPunct="1">
+              <a:lnSpc>
+                <a:spcPct val="90000"/>
+              </a:lnSpc>
+              <a:spcBef>
+                <a:spcPts val="500"/>
+              </a:spcBef>
+              <a:buFont typeface="Arial"/>
+              <a:buChar char="•"/>
+              <a:defRPr sz="1800" b="0" i="0" kern="1200">
+                <a:solidFill>
+                  <a:schemeClr val="tx1"/>
+                </a:solidFill>
+                <a:latin typeface="+mn-lt"/>
+                <a:ea typeface="Open Sans Light" charset="0"/>
+                <a:cs typeface="Open Sans Light" charset="0"/>
+              </a:defRPr>
+            </a:lvl4pPr>
+            <a:lvl5pPr marL="2057400" indent="-228600" algn="l" defTabSz="914400" rtl="0" eaLnBrk="1" latinLnBrk="0" hangingPunct="1">
+              <a:lnSpc>
+                <a:spcPct val="90000"/>
+              </a:lnSpc>
+              <a:spcBef>
+                <a:spcPts val="500"/>
+              </a:spcBef>
+              <a:buFont typeface="Arial"/>
+              <a:buChar char="•"/>
+              <a:defRPr sz="1800" b="0" i="0" kern="1200">
+                <a:solidFill>
+                  <a:schemeClr val="tx1"/>
+                </a:solidFill>
+                <a:latin typeface="+mn-lt"/>
+                <a:ea typeface="Open Sans Light" charset="0"/>
+                <a:cs typeface="Open Sans Light" charset="0"/>
+              </a:defRPr>
+            </a:lvl5pPr>
+            <a:lvl6pPr marL="2514600" indent="-228600" algn="l" defTabSz="914400" rtl="0" eaLnBrk="1" latinLnBrk="0" hangingPunct="1">
+              <a:lnSpc>
+                <a:spcPct val="90000"/>
+              </a:lnSpc>
+              <a:spcBef>
+                <a:spcPts val="500"/>
+              </a:spcBef>
+              <a:buFont typeface="Arial"/>
+              <a:buChar char="•"/>
+              <a:defRPr sz="1800" kern="1200">
+                <a:solidFill>
+                  <a:schemeClr val="tx1"/>
+                </a:solidFill>
+                <a:latin typeface="+mn-lt"/>
+                <a:ea typeface="+mn-ea"/>
+                <a:cs typeface="+mn-cs"/>
+              </a:defRPr>
+            </a:lvl6pPr>
+            <a:lvl7pPr marL="2971800" indent="-228600" algn="l" defTabSz="914400" rtl="0" eaLnBrk="1" latinLnBrk="0" hangingPunct="1">
+              <a:lnSpc>
+                <a:spcPct val="90000"/>
+              </a:lnSpc>
+              <a:spcBef>
+                <a:spcPts val="500"/>
+              </a:spcBef>
+              <a:buFont typeface="Arial"/>
+              <a:buChar char="•"/>
+              <a:defRPr sz="1800" kern="1200">
+                <a:solidFill>
+                  <a:schemeClr val="tx1"/>
+                </a:solidFill>
+                <a:latin typeface="+mn-lt"/>
+                <a:ea typeface="+mn-ea"/>
+                <a:cs typeface="+mn-cs"/>
+              </a:defRPr>
+            </a:lvl7pPr>
+            <a:lvl8pPr marL="3429000" indent="-228600" algn="l" defTabSz="914400" rtl="0" eaLnBrk="1" latinLnBrk="0" hangingPunct="1">
+              <a:lnSpc>
+                <a:spcPct val="90000"/>
+              </a:lnSpc>
+              <a:spcBef>
+                <a:spcPts val="500"/>
+              </a:spcBef>
+              <a:buFont typeface="Arial"/>
+              <a:buChar char="•"/>
+              <a:defRPr sz="1800" kern="1200">
+                <a:solidFill>
+                  <a:schemeClr val="tx1"/>
+                </a:solidFill>
+                <a:latin typeface="+mn-lt"/>
+                <a:ea typeface="+mn-ea"/>
+                <a:cs typeface="+mn-cs"/>
+              </a:defRPr>
+            </a:lvl8pPr>
+            <a:lvl9pPr marL="3886200" indent="-228600" algn="l" defTabSz="914400" rtl="0" eaLnBrk="1" latinLnBrk="0" hangingPunct="1">
+              <a:lnSpc>
+                <a:spcPct val="90000"/>
+              </a:lnSpc>
+              <a:spcBef>
+                <a:spcPts val="500"/>
+              </a:spcBef>
+              <a:buFont typeface="Arial"/>
+              <a:buChar char="•"/>
+              <a:defRPr sz="1800" kern="1200">
+                <a:solidFill>
+                  <a:schemeClr val="tx1"/>
+                </a:solidFill>
+                <a:latin typeface="+mn-lt"/>
+                <a:ea typeface="+mn-ea"/>
+                <a:cs typeface="+mn-cs"/>
+              </a:defRPr>
+            </a:lvl9pPr>
+          </a:lstStyle>
+          <a:p>
+            <a:endParaRPr lang="ru-RU" sz="2400"/>
+          </a:p>
+        </p:txBody>
+      </p:sp>
+      <p:sp>
+        <p:nvSpPr>
+          <p:cNvPr id="7" name="Объект 2">
+            <a:extLst>
+              <a:ext uri="{FF2B5EF4-FFF2-40B4-BE49-F238E27FC236}">
+                <a16:creationId xmlns:a16="http://schemas.microsoft.com/office/drawing/2014/main" id="{512B4D52-8AF2-94BD-2889-8C01ADE03492}"/>
+              </a:ext>
+            </a:extLst>
+          </p:cNvPr>
+          <p:cNvSpPr txBox="1">
+            <a:spLocks/>
+          </p:cNvSpPr>
+          <p:nvPr/>
+        </p:nvSpPr>
+        <p:spPr>
+          <a:xfrm>
+            <a:off x="300038" y="4794256"/>
+            <a:ext cx="4722724" cy="1518222"/>
+          </a:xfrm>
+          <a:prstGeom prst="roundRect">
+            <a:avLst>
+              <a:gd name="adj" fmla="val 4817"/>
+            </a:avLst>
+          </a:prstGeom>
+          <a:ln w="12700">
+            <a:solidFill>
+              <a:srgbClr val="1A3773"/>
+            </a:solidFill>
+            <a:prstDash val="dash"/>
+          </a:ln>
+        </p:spPr>
+        <p:txBody>
+          <a:bodyPr anchor="ctr"/>
+          <a:lstStyle>
+            <a:lvl1pPr marL="0" indent="0" algn="ctr" defTabSz="914400" rtl="0" eaLnBrk="1" latinLnBrk="0" hangingPunct="1">
+              <a:lnSpc>
+                <a:spcPct val="90000"/>
+              </a:lnSpc>
+              <a:spcBef>
+                <a:spcPts val="1000"/>
+              </a:spcBef>
+              <a:buFont typeface="Arial"/>
+              <a:buNone/>
+              <a:defRPr sz="2800" b="0" i="0" kern="1200">
+                <a:solidFill>
+                  <a:schemeClr val="tx1">
+                    <a:lumMod val="85000"/>
+                    <a:lumOff val="15000"/>
+                  </a:schemeClr>
+                </a:solidFill>
+                <a:latin typeface="+mn-lt"/>
+                <a:ea typeface="Open Sans Light" charset="0"/>
+                <a:cs typeface="Open Sans Light" charset="0"/>
+              </a:defRPr>
+            </a:lvl1pPr>
+            <a:lvl2pPr marL="685800" indent="-228600" algn="l" defTabSz="914400" rtl="0" eaLnBrk="1" latinLnBrk="0" hangingPunct="1">
+              <a:lnSpc>
+                <a:spcPct val="90000"/>
+              </a:lnSpc>
+              <a:spcBef>
+                <a:spcPts val="500"/>
+              </a:spcBef>
+              <a:buFont typeface="Arial"/>
+              <a:buChar char="•"/>
+              <a:defRPr sz="2400" b="0" i="0" kern="1200">
+                <a:solidFill>
+                  <a:schemeClr val="tx1"/>
+                </a:solidFill>
+                <a:latin typeface="+mn-lt"/>
+                <a:ea typeface="Open Sans Light" charset="0"/>
+                <a:cs typeface="Open Sans Light" charset="0"/>
+              </a:defRPr>
+            </a:lvl2pPr>
+            <a:lvl3pPr marL="1143000" indent="-228600" algn="l" defTabSz="914400" rtl="0" eaLnBrk="1" latinLnBrk="0" hangingPunct="1">
+              <a:lnSpc>
+                <a:spcPct val="90000"/>
+              </a:lnSpc>
+              <a:spcBef>
+                <a:spcPts val="500"/>
+              </a:spcBef>
+              <a:buFont typeface="Arial"/>
+              <a:buChar char="•"/>
+              <a:defRPr sz="2000" b="0" i="0" kern="1200">
+                <a:solidFill>
+                  <a:schemeClr val="tx1"/>
+                </a:solidFill>
+                <a:latin typeface="+mn-lt"/>
+                <a:ea typeface="Open Sans Light" charset="0"/>
+                <a:cs typeface="Open Sans Light" charset="0"/>
+              </a:defRPr>
+            </a:lvl3pPr>
+            <a:lvl4pPr marL="1600200" indent="-228600" algn="l" defTabSz="914400" rtl="0" eaLnBrk="1" latinLnBrk="0" hangingPunct="1">
+              <a:lnSpc>
+                <a:spcPct val="90000"/>
+              </a:lnSpc>
+              <a:spcBef>
+                <a:spcPts val="500"/>
+              </a:spcBef>
+              <a:buFont typeface="Arial"/>
+              <a:buChar char="•"/>
+              <a:defRPr sz="1800" b="0" i="0" kern="1200">
+                <a:solidFill>
+                  <a:schemeClr val="tx1"/>
+                </a:solidFill>
+                <a:latin typeface="+mn-lt"/>
+                <a:ea typeface="Open Sans Light" charset="0"/>
+                <a:cs typeface="Open Sans Light" charset="0"/>
+              </a:defRPr>
+            </a:lvl4pPr>
+            <a:lvl5pPr marL="2057400" indent="-228600" algn="l" defTabSz="914400" rtl="0" eaLnBrk="1" latinLnBrk="0" hangingPunct="1">
+              <a:lnSpc>
+                <a:spcPct val="90000"/>
+              </a:lnSpc>
+              <a:spcBef>
+                <a:spcPts val="500"/>
+              </a:spcBef>
+              <a:buFont typeface="Arial"/>
+              <a:buChar char="•"/>
+              <a:defRPr sz="1800" b="0" i="0" kern="1200">
+                <a:solidFill>
+                  <a:schemeClr val="tx1"/>
+                </a:solidFill>
+                <a:latin typeface="+mn-lt"/>
+                <a:ea typeface="Open Sans Light" charset="0"/>
+                <a:cs typeface="Open Sans Light" charset="0"/>
+              </a:defRPr>
+            </a:lvl5pPr>
+            <a:lvl6pPr marL="2514600" indent="-228600" algn="l" defTabSz="914400" rtl="0" eaLnBrk="1" latinLnBrk="0" hangingPunct="1">
+              <a:lnSpc>
+                <a:spcPct val="90000"/>
+              </a:lnSpc>
+              <a:spcBef>
+                <a:spcPts val="500"/>
+              </a:spcBef>
+              <a:buFont typeface="Arial"/>
+              <a:buChar char="•"/>
+              <a:defRPr sz="1800" kern="1200">
+                <a:solidFill>
+                  <a:schemeClr val="tx1"/>
+                </a:solidFill>
+                <a:latin typeface="+mn-lt"/>
+                <a:ea typeface="+mn-ea"/>
+                <a:cs typeface="+mn-cs"/>
+              </a:defRPr>
+            </a:lvl6pPr>
+            <a:lvl7pPr marL="2971800" indent="-228600" algn="l" defTabSz="914400" rtl="0" eaLnBrk="1" latinLnBrk="0" hangingPunct="1">
+              <a:lnSpc>
+                <a:spcPct val="90000"/>
+              </a:lnSpc>
+              <a:spcBef>
+                <a:spcPts val="500"/>
+              </a:spcBef>
+              <a:buFont typeface="Arial"/>
+              <a:buChar char="•"/>
+              <a:defRPr sz="1800" kern="1200">
+                <a:solidFill>
+                  <a:schemeClr val="tx1"/>
+                </a:solidFill>
+                <a:latin typeface="+mn-lt"/>
+                <a:ea typeface="+mn-ea"/>
+                <a:cs typeface="+mn-cs"/>
+              </a:defRPr>
+            </a:lvl7pPr>
+            <a:lvl8pPr marL="3429000" indent="-228600" algn="l" defTabSz="914400" rtl="0" eaLnBrk="1" latinLnBrk="0" hangingPunct="1">
+              <a:lnSpc>
+                <a:spcPct val="90000"/>
+              </a:lnSpc>
+              <a:spcBef>
+                <a:spcPts val="500"/>
+              </a:spcBef>
+              <a:buFont typeface="Arial"/>
+              <a:buChar char="•"/>
+              <a:defRPr sz="1800" kern="1200">
+                <a:solidFill>
+                  <a:schemeClr val="tx1"/>
+                </a:solidFill>
+                <a:latin typeface="+mn-lt"/>
+                <a:ea typeface="+mn-ea"/>
+                <a:cs typeface="+mn-cs"/>
+              </a:defRPr>
+            </a:lvl8pPr>
+            <a:lvl9pPr marL="3886200" indent="-228600" algn="l" defTabSz="914400" rtl="0" eaLnBrk="1" latinLnBrk="0" hangingPunct="1">
+              <a:lnSpc>
+                <a:spcPct val="90000"/>
+              </a:lnSpc>
+              <a:spcBef>
+                <a:spcPts val="500"/>
+              </a:spcBef>
+              <a:buFont typeface="Arial"/>
+              <a:buChar char="•"/>
+              <a:defRPr sz="1800" kern="1200">
+                <a:solidFill>
+                  <a:schemeClr val="tx1"/>
+                </a:solidFill>
+                <a:latin typeface="+mn-lt"/>
+                <a:ea typeface="+mn-ea"/>
+                <a:cs typeface="+mn-cs"/>
+              </a:defRPr>
+            </a:lvl9pPr>
+          </a:lstStyle>
+          <a:p>
+            <a:endParaRPr lang="ru-RU" sz="2400"/>
+          </a:p>
+        </p:txBody>
+      </p:sp>
+      <p:sp>
+        <p:nvSpPr>
+          <p:cNvPr id="10" name="Объект 2">
+            <a:extLst>
+              <a:ext uri="{FF2B5EF4-FFF2-40B4-BE49-F238E27FC236}">
+                <a16:creationId xmlns:a16="http://schemas.microsoft.com/office/drawing/2014/main" id="{849682E0-59A3-B62E-1DF7-358D9478BC0C}"/>
+              </a:ext>
+            </a:extLst>
+          </p:cNvPr>
+          <p:cNvSpPr txBox="1">
+            <a:spLocks/>
+          </p:cNvSpPr>
+          <p:nvPr/>
+        </p:nvSpPr>
+        <p:spPr>
+          <a:xfrm>
+            <a:off x="5447485" y="1017431"/>
+            <a:ext cx="5250567" cy="2558603"/>
+          </a:xfrm>
+          <a:prstGeom prst="roundRect">
+            <a:avLst>
+              <a:gd name="adj" fmla="val 4817"/>
+            </a:avLst>
+          </a:prstGeom>
+          <a:ln w="12700">
+            <a:solidFill>
+              <a:srgbClr val="1A3773"/>
+            </a:solidFill>
+            <a:prstDash val="dash"/>
+          </a:ln>
+        </p:spPr>
+        <p:txBody>
+          <a:bodyPr anchor="ctr"/>
+          <a:lstStyle>
+            <a:lvl1pPr marL="0" indent="0" algn="ctr" defTabSz="914400" rtl="0" eaLnBrk="1" latinLnBrk="0" hangingPunct="1">
+              <a:lnSpc>
+                <a:spcPct val="90000"/>
+              </a:lnSpc>
+              <a:spcBef>
+                <a:spcPts val="1000"/>
+              </a:spcBef>
+              <a:buFont typeface="Arial"/>
+              <a:buNone/>
+              <a:defRPr sz="2800" b="0" i="0" kern="1200">
+                <a:solidFill>
+                  <a:schemeClr val="tx1">
+                    <a:lumMod val="85000"/>
+                    <a:lumOff val="15000"/>
+                  </a:schemeClr>
+                </a:solidFill>
+                <a:latin typeface="+mn-lt"/>
+                <a:ea typeface="Open Sans Light" charset="0"/>
+                <a:cs typeface="Open Sans Light" charset="0"/>
+              </a:defRPr>
+            </a:lvl1pPr>
+            <a:lvl2pPr marL="685800" indent="-228600" algn="l" defTabSz="914400" rtl="0" eaLnBrk="1" latinLnBrk="0" hangingPunct="1">
+              <a:lnSpc>
+                <a:spcPct val="90000"/>
+              </a:lnSpc>
+              <a:spcBef>
+                <a:spcPts val="500"/>
+              </a:spcBef>
+              <a:buFont typeface="Arial"/>
+              <a:buChar char="•"/>
+              <a:defRPr sz="2400" b="0" i="0" kern="1200">
+                <a:solidFill>
+                  <a:schemeClr val="tx1"/>
+                </a:solidFill>
+                <a:latin typeface="+mn-lt"/>
+                <a:ea typeface="Open Sans Light" charset="0"/>
+                <a:cs typeface="Open Sans Light" charset="0"/>
+              </a:defRPr>
+            </a:lvl2pPr>
+            <a:lvl3pPr marL="1143000" indent="-228600" algn="l" defTabSz="914400" rtl="0" eaLnBrk="1" latinLnBrk="0" hangingPunct="1">
+              <a:lnSpc>
+                <a:spcPct val="90000"/>
+              </a:lnSpc>
+              <a:spcBef>
+                <a:spcPts val="500"/>
+              </a:spcBef>
+              <a:buFont typeface="Arial"/>
+              <a:buChar char="•"/>
+              <a:defRPr sz="2000" b="0" i="0" kern="1200">
+                <a:solidFill>
+                  <a:schemeClr val="tx1"/>
+                </a:solidFill>
+                <a:latin typeface="+mn-lt"/>
+                <a:ea typeface="Open Sans Light" charset="0"/>
+                <a:cs typeface="Open Sans Light" charset="0"/>
+              </a:defRPr>
+            </a:lvl3pPr>
+            <a:lvl4pPr marL="1600200" indent="-228600" algn="l" defTabSz="914400" rtl="0" eaLnBrk="1" latinLnBrk="0" hangingPunct="1">
+              <a:lnSpc>
+                <a:spcPct val="90000"/>
+              </a:lnSpc>
+              <a:spcBef>
+                <a:spcPts val="500"/>
+              </a:spcBef>
+              <a:buFont typeface="Arial"/>
+              <a:buChar char="•"/>
+              <a:defRPr sz="1800" b="0" i="0" kern="1200">
+                <a:solidFill>
+                  <a:schemeClr val="tx1"/>
+                </a:solidFill>
+                <a:latin typeface="+mn-lt"/>
+                <a:ea typeface="Open Sans Light" charset="0"/>
+                <a:cs typeface="Open Sans Light" charset="0"/>
+              </a:defRPr>
+            </a:lvl4pPr>
+            <a:lvl5pPr marL="2057400" indent="-228600" algn="l" defTabSz="914400" rtl="0" eaLnBrk="1" latinLnBrk="0" hangingPunct="1">
+              <a:lnSpc>
+                <a:spcPct val="90000"/>
+              </a:lnSpc>
+              <a:spcBef>
+                <a:spcPts val="500"/>
+              </a:spcBef>
+              <a:buFont typeface="Arial"/>
+              <a:buChar char="•"/>
+              <a:defRPr sz="1800" b="0" i="0" kern="1200">
+                <a:solidFill>
+                  <a:schemeClr val="tx1"/>
+                </a:solidFill>
+                <a:latin typeface="+mn-lt"/>
+                <a:ea typeface="Open Sans Light" charset="0"/>
+                <a:cs typeface="Open Sans Light" charset="0"/>
+              </a:defRPr>
+            </a:lvl5pPr>
+            <a:lvl6pPr marL="2514600" indent="-228600" algn="l" defTabSz="914400" rtl="0" eaLnBrk="1" latinLnBrk="0" hangingPunct="1">
+              <a:lnSpc>
+                <a:spcPct val="90000"/>
+              </a:lnSpc>
+              <a:spcBef>
+                <a:spcPts val="500"/>
+              </a:spcBef>
+              <a:buFont typeface="Arial"/>
+              <a:buChar char="•"/>
+              <a:defRPr sz="1800" kern="1200">
+                <a:solidFill>
+                  <a:schemeClr val="tx1"/>
+                </a:solidFill>
+                <a:latin typeface="+mn-lt"/>
+                <a:ea typeface="+mn-ea"/>
+                <a:cs typeface="+mn-cs"/>
+              </a:defRPr>
+            </a:lvl6pPr>
+            <a:lvl7pPr marL="2971800" indent="-228600" algn="l" defTabSz="914400" rtl="0" eaLnBrk="1" latinLnBrk="0" hangingPunct="1">
+              <a:lnSpc>
+                <a:spcPct val="90000"/>
+              </a:lnSpc>
+              <a:spcBef>
+                <a:spcPts val="500"/>
+              </a:spcBef>
+              <a:buFont typeface="Arial"/>
+              <a:buChar char="•"/>
+              <a:defRPr sz="1800" kern="1200">
+                <a:solidFill>
+                  <a:schemeClr val="tx1"/>
+                </a:solidFill>
+                <a:latin typeface="+mn-lt"/>
+                <a:ea typeface="+mn-ea"/>
+                <a:cs typeface="+mn-cs"/>
+              </a:defRPr>
+            </a:lvl7pPr>
+            <a:lvl8pPr marL="3429000" indent="-228600" algn="l" defTabSz="914400" rtl="0" eaLnBrk="1" latinLnBrk="0" hangingPunct="1">
+              <a:lnSpc>
+                <a:spcPct val="90000"/>
+              </a:lnSpc>
+              <a:spcBef>
+                <a:spcPts val="500"/>
+              </a:spcBef>
+              <a:buFont typeface="Arial"/>
+              <a:buChar char="•"/>
+              <a:defRPr sz="1800" kern="1200">
+                <a:solidFill>
+                  <a:schemeClr val="tx1"/>
+                </a:solidFill>
+                <a:latin typeface="+mn-lt"/>
+                <a:ea typeface="+mn-ea"/>
+                <a:cs typeface="+mn-cs"/>
+              </a:defRPr>
+            </a:lvl8pPr>
+            <a:lvl9pPr marL="3886200" indent="-228600" algn="l" defTabSz="914400" rtl="0" eaLnBrk="1" latinLnBrk="0" hangingPunct="1">
+              <a:lnSpc>
+                <a:spcPct val="90000"/>
+              </a:lnSpc>
+              <a:spcBef>
+                <a:spcPts val="500"/>
+              </a:spcBef>
+              <a:buFont typeface="Arial"/>
+              <a:buChar char="•"/>
+              <a:defRPr sz="1800" kern="1200">
+                <a:solidFill>
+                  <a:schemeClr val="tx1"/>
+                </a:solidFill>
+                <a:latin typeface="+mn-lt"/>
+                <a:ea typeface="+mn-ea"/>
+                <a:cs typeface="+mn-cs"/>
+              </a:defRPr>
+            </a:lvl9pPr>
+          </a:lstStyle>
+          <a:p>
+            <a:endParaRPr lang="ru-RU" sz="2400"/>
+          </a:p>
+        </p:txBody>
+      </p:sp>
+      <p:sp>
+        <p:nvSpPr>
+          <p:cNvPr id="11" name="Объект 2">
+            <a:extLst>
+              <a:ext uri="{FF2B5EF4-FFF2-40B4-BE49-F238E27FC236}">
+                <a16:creationId xmlns:a16="http://schemas.microsoft.com/office/drawing/2014/main" id="{368DE392-02FE-3E59-7DB4-E9D2B20B8569}"/>
+              </a:ext>
+            </a:extLst>
+          </p:cNvPr>
+          <p:cNvSpPr txBox="1">
+            <a:spLocks/>
+          </p:cNvSpPr>
+          <p:nvPr/>
+        </p:nvSpPr>
+        <p:spPr>
+          <a:xfrm>
+            <a:off x="5447484" y="3673276"/>
+            <a:ext cx="5250568" cy="2639201"/>
+          </a:xfrm>
+          <a:prstGeom prst="roundRect">
+            <a:avLst>
+              <a:gd name="adj" fmla="val 4817"/>
+            </a:avLst>
+          </a:prstGeom>
+          <a:ln w="12700">
+            <a:solidFill>
+              <a:srgbClr val="1A3773"/>
+            </a:solidFill>
+            <a:prstDash val="dash"/>
+          </a:ln>
+        </p:spPr>
+        <p:txBody>
+          <a:bodyPr anchor="ctr"/>
+          <a:lstStyle>
+            <a:lvl1pPr marL="0" indent="0" algn="ctr" defTabSz="914400" rtl="0" eaLnBrk="1" latinLnBrk="0" hangingPunct="1">
+              <a:lnSpc>
+                <a:spcPct val="90000"/>
+              </a:lnSpc>
+              <a:spcBef>
+                <a:spcPts val="1000"/>
+              </a:spcBef>
+              <a:buFont typeface="Arial"/>
+              <a:buNone/>
+              <a:defRPr sz="2800" b="0" i="0" kern="1200">
+                <a:solidFill>
+                  <a:schemeClr val="tx1">
+                    <a:lumMod val="85000"/>
+                    <a:lumOff val="15000"/>
+                  </a:schemeClr>
+                </a:solidFill>
+                <a:latin typeface="+mn-lt"/>
+                <a:ea typeface="Open Sans Light" charset="0"/>
+                <a:cs typeface="Open Sans Light" charset="0"/>
+              </a:defRPr>
+            </a:lvl1pPr>
+            <a:lvl2pPr marL="685800" indent="-228600" algn="l" defTabSz="914400" rtl="0" eaLnBrk="1" latinLnBrk="0" hangingPunct="1">
+              <a:lnSpc>
+                <a:spcPct val="90000"/>
+              </a:lnSpc>
+              <a:spcBef>
+                <a:spcPts val="500"/>
+              </a:spcBef>
+              <a:buFont typeface="Arial"/>
+              <a:buChar char="•"/>
+              <a:defRPr sz="2400" b="0" i="0" kern="1200">
+                <a:solidFill>
+                  <a:schemeClr val="tx1"/>
+                </a:solidFill>
+                <a:latin typeface="+mn-lt"/>
+                <a:ea typeface="Open Sans Light" charset="0"/>
+                <a:cs typeface="Open Sans Light" charset="0"/>
+              </a:defRPr>
+            </a:lvl2pPr>
+            <a:lvl3pPr marL="1143000" indent="-228600" algn="l" defTabSz="914400" rtl="0" eaLnBrk="1" latinLnBrk="0" hangingPunct="1">
+              <a:lnSpc>
+                <a:spcPct val="90000"/>
+              </a:lnSpc>
+              <a:spcBef>
+                <a:spcPts val="500"/>
+              </a:spcBef>
+              <a:buFont typeface="Arial"/>
+              <a:buChar char="•"/>
+              <a:defRPr sz="2000" b="0" i="0" kern="1200">
+                <a:solidFill>
+                  <a:schemeClr val="tx1"/>
+                </a:solidFill>
+                <a:latin typeface="+mn-lt"/>
+                <a:ea typeface="Open Sans Light" charset="0"/>
+                <a:cs typeface="Open Sans Light" charset="0"/>
+              </a:defRPr>
+            </a:lvl3pPr>
+            <a:lvl4pPr marL="1600200" indent="-228600" algn="l" defTabSz="914400" rtl="0" eaLnBrk="1" latinLnBrk="0" hangingPunct="1">
+              <a:lnSpc>
+                <a:spcPct val="90000"/>
+              </a:lnSpc>
+              <a:spcBef>
+                <a:spcPts val="500"/>
+              </a:spcBef>
+              <a:buFont typeface="Arial"/>
+              <a:buChar char="•"/>
+              <a:defRPr sz="1800" b="0" i="0" kern="1200">
+                <a:solidFill>
+                  <a:schemeClr val="tx1"/>
+                </a:solidFill>
+                <a:latin typeface="+mn-lt"/>
+                <a:ea typeface="Open Sans Light" charset="0"/>
+                <a:cs typeface="Open Sans Light" charset="0"/>
+              </a:defRPr>
+            </a:lvl4pPr>
+            <a:lvl5pPr marL="2057400" indent="-228600" algn="l" defTabSz="914400" rtl="0" eaLnBrk="1" latinLnBrk="0" hangingPunct="1">
+              <a:lnSpc>
+                <a:spcPct val="90000"/>
+              </a:lnSpc>
+              <a:spcBef>
+                <a:spcPts val="500"/>
+              </a:spcBef>
+              <a:buFont typeface="Arial"/>
+              <a:buChar char="•"/>
+              <a:defRPr sz="1800" b="0" i="0" kern="1200">
+                <a:solidFill>
+                  <a:schemeClr val="tx1"/>
+                </a:solidFill>
+                <a:latin typeface="+mn-lt"/>
+                <a:ea typeface="Open Sans Light" charset="0"/>
+                <a:cs typeface="Open Sans Light" charset="0"/>
+              </a:defRPr>
+            </a:lvl5pPr>
+            <a:lvl6pPr marL="2514600" indent="-228600" algn="l" defTabSz="914400" rtl="0" eaLnBrk="1" latinLnBrk="0" hangingPunct="1">
+              <a:lnSpc>
+                <a:spcPct val="90000"/>
+              </a:lnSpc>
+              <a:spcBef>
+                <a:spcPts val="500"/>
+              </a:spcBef>
+              <a:buFont typeface="Arial"/>
+              <a:buChar char="•"/>
+              <a:defRPr sz="1800" kern="1200">
+                <a:solidFill>
+                  <a:schemeClr val="tx1"/>
+                </a:solidFill>
+                <a:latin typeface="+mn-lt"/>
+                <a:ea typeface="+mn-ea"/>
+                <a:cs typeface="+mn-cs"/>
+              </a:defRPr>
+            </a:lvl6pPr>
+            <a:lvl7pPr marL="2971800" indent="-228600" algn="l" defTabSz="914400" rtl="0" eaLnBrk="1" latinLnBrk="0" hangingPunct="1">
+              <a:lnSpc>
+                <a:spcPct val="90000"/>
+              </a:lnSpc>
+              <a:spcBef>
+                <a:spcPts val="500"/>
+              </a:spcBef>
+              <a:buFont typeface="Arial"/>
+              <a:buChar char="•"/>
+              <a:defRPr sz="1800" kern="1200">
+                <a:solidFill>
+                  <a:schemeClr val="tx1"/>
+                </a:solidFill>
+                <a:latin typeface="+mn-lt"/>
+                <a:ea typeface="+mn-ea"/>
+                <a:cs typeface="+mn-cs"/>
+              </a:defRPr>
+            </a:lvl7pPr>
+            <a:lvl8pPr marL="3429000" indent="-228600" algn="l" defTabSz="914400" rtl="0" eaLnBrk="1" latinLnBrk="0" hangingPunct="1">
+              <a:lnSpc>
+                <a:spcPct val="90000"/>
+              </a:lnSpc>
+              <a:spcBef>
+                <a:spcPts val="500"/>
+              </a:spcBef>
+              <a:buFont typeface="Arial"/>
+              <a:buChar char="•"/>
+              <a:defRPr sz="1800" kern="1200">
+                <a:solidFill>
+                  <a:schemeClr val="tx1"/>
+                </a:solidFill>
+                <a:latin typeface="+mn-lt"/>
+                <a:ea typeface="+mn-ea"/>
+                <a:cs typeface="+mn-cs"/>
+              </a:defRPr>
+            </a:lvl8pPr>
+            <a:lvl9pPr marL="3886200" indent="-228600" algn="l" defTabSz="914400" rtl="0" eaLnBrk="1" latinLnBrk="0" hangingPunct="1">
+              <a:lnSpc>
+                <a:spcPct val="90000"/>
+              </a:lnSpc>
+              <a:spcBef>
+                <a:spcPts val="500"/>
+              </a:spcBef>
+              <a:buFont typeface="Arial"/>
+              <a:buChar char="•"/>
+              <a:defRPr sz="1800" kern="1200">
+                <a:solidFill>
+                  <a:schemeClr val="tx1"/>
+                </a:solidFill>
+                <a:latin typeface="+mn-lt"/>
+                <a:ea typeface="+mn-ea"/>
+                <a:cs typeface="+mn-cs"/>
+              </a:defRPr>
+            </a:lvl9pPr>
+          </a:lstStyle>
+          <a:p>
+            <a:endParaRPr lang="ru-RU" sz="2400"/>
+          </a:p>
+        </p:txBody>
+      </p:sp>
+    </p:spTree>
+    <p:extLst>
+      <p:ext uri="{BB962C8B-B14F-4D97-AF65-F5344CB8AC3E}">
+        <p14:creationId xmlns:p14="http://schemas.microsoft.com/office/powerpoint/2010/main" val="2238606129"/>
+      </p:ext>
+    </p:extLst>
+  </p:cSld>
+  <p:clrMapOvr>
+    <a:masterClrMapping/>
+  </p:clrMapOvr>
+</p:sld>
+</file>
+
+<file path=ppt/slides/slide11.xml><?xml version="1.0" encoding="utf-8"?>
+<p:sld xmlns:a="http://schemas.openxmlformats.org/drawingml/2006/main" xmlns:r="http://schemas.openxmlformats.org/officeDocument/2006/relationships" xmlns:p="http://schemas.openxmlformats.org/presentationml/2006/main">
+  <p:cSld>
+    <p:spTree>
+      <p:nvGrpSpPr>
+        <p:cNvPr id="1" name="">
+          <a:extLst>
+            <a:ext uri="{FF2B5EF4-FFF2-40B4-BE49-F238E27FC236}">
+              <a16:creationId xmlns:a16="http://schemas.microsoft.com/office/drawing/2014/main" id="{0AB2C82B-38BA-2992-D4DF-3491A6B2440B}"/>
+            </a:ext>
+          </a:extLst>
+        </p:cNvPr>
+        <p:cNvGrpSpPr/>
+        <p:nvPr/>
+      </p:nvGrpSpPr>
+      <p:grpSpPr>
+        <a:xfrm>
+          <a:off x="0" y="0"/>
+          <a:ext cx="0" cy="0"/>
+          <a:chOff x="0" y="0"/>
+          <a:chExt cx="0" cy="0"/>
+        </a:xfrm>
+      </p:grpSpPr>
+      <p:sp>
+        <p:nvSpPr>
+          <p:cNvPr id="6" name="TextBox 5">
+            <a:extLst>
+              <a:ext uri="{FF2B5EF4-FFF2-40B4-BE49-F238E27FC236}">
+                <a16:creationId xmlns:a16="http://schemas.microsoft.com/office/drawing/2014/main" id="{7E467FC4-B2FC-F2B4-A09E-0813137324AC}"/>
+              </a:ext>
+            </a:extLst>
+          </p:cNvPr>
+          <p:cNvSpPr txBox="1"/>
+          <p:nvPr/>
+        </p:nvSpPr>
+        <p:spPr>
+          <a:xfrm>
+            <a:off x="3784600" y="273858"/>
+            <a:ext cx="8107363" cy="646331"/>
+          </a:xfrm>
+          <a:prstGeom prst="rect">
+            <a:avLst/>
+          </a:prstGeom>
+          <a:noFill/>
+        </p:spPr>
+        <p:txBody>
+          <a:bodyPr wrap="square" rtlCol="0">
+            <a:spAutoFit/>
+          </a:bodyPr>
+          <a:lstStyle/>
+          <a:p>
+            <a:r>
+              <a:rPr lang="ru-RU" sz="3600" dirty="0">
+                <a:solidFill>
+                  <a:srgbClr val="274E9C"/>
+                </a:solidFill>
+                <a:latin typeface="Inter Variable Text Medium" panose="02000503000000020004" pitchFamily="2" charset="0"/>
+                <a:ea typeface="Inter Variable Text Medium" panose="02000503000000020004" pitchFamily="2" charset="0"/>
+                <a:cs typeface="Inter Variable Text Medium" panose="02000503000000020004" pitchFamily="2" charset="0"/>
+              </a:rPr>
+              <a:t>Модуль поддержки и премиум функции</a:t>
+            </a:r>
+          </a:p>
+        </p:txBody>
+      </p:sp>
+      <p:pic>
+        <p:nvPicPr>
+          <p:cNvPr id="2" name="Рисунок 1">
+            <a:extLst>
+              <a:ext uri="{FF2B5EF4-FFF2-40B4-BE49-F238E27FC236}">
+                <a16:creationId xmlns:a16="http://schemas.microsoft.com/office/drawing/2014/main" id="{EEC260E8-4A4D-5FE2-6F01-B69EAD9C955A}"/>
+              </a:ext>
+            </a:extLst>
+          </p:cNvPr>
+          <p:cNvPicPr>
+            <a:picLocks noChangeAspect="1"/>
+          </p:cNvPicPr>
+          <p:nvPr/>
+        </p:nvPicPr>
+        <p:blipFill>
+          <a:blip r:embed="rId3"/>
+          <a:stretch>
+            <a:fillRect/>
+          </a:stretch>
+        </p:blipFill>
+        <p:spPr>
+          <a:xfrm>
+            <a:off x="300037" y="273858"/>
+            <a:ext cx="2990861" cy="640543"/>
+          </a:xfrm>
+          <a:prstGeom prst="rect">
+            <a:avLst/>
+          </a:prstGeom>
+        </p:spPr>
+      </p:pic>
+      <p:grpSp>
+        <p:nvGrpSpPr>
+          <p:cNvPr id="15" name="Группа 14">
+            <a:extLst>
+              <a:ext uri="{FF2B5EF4-FFF2-40B4-BE49-F238E27FC236}">
+                <a16:creationId xmlns:a16="http://schemas.microsoft.com/office/drawing/2014/main" id="{ED436DBA-7CC6-5EA0-85EB-4EB5D17C5212}"/>
+              </a:ext>
+            </a:extLst>
+          </p:cNvPr>
+          <p:cNvGrpSpPr/>
+          <p:nvPr/>
+        </p:nvGrpSpPr>
+        <p:grpSpPr>
+          <a:xfrm>
+            <a:off x="11641128" y="6312477"/>
+            <a:ext cx="490760" cy="490760"/>
+            <a:chOff x="11383518" y="6084717"/>
+            <a:chExt cx="618259" cy="618259"/>
+          </a:xfrm>
+        </p:grpSpPr>
+        <p:sp>
+          <p:nvSpPr>
+            <p:cNvPr id="16" name="Прямоугольник: скругленные углы 15">
+              <a:extLst>
+                <a:ext uri="{FF2B5EF4-FFF2-40B4-BE49-F238E27FC236}">
+                  <a16:creationId xmlns:a16="http://schemas.microsoft.com/office/drawing/2014/main" id="{E3B94B1D-C917-E218-4E16-54E8239DBFE5}"/>
+                </a:ext>
+              </a:extLst>
+            </p:cNvPr>
+            <p:cNvSpPr/>
+            <p:nvPr/>
+          </p:nvSpPr>
+          <p:spPr>
+            <a:xfrm>
+              <a:off x="11383518" y="6084717"/>
+              <a:ext cx="618259" cy="618259"/>
+            </a:xfrm>
+            <a:prstGeom prst="roundRect">
+              <a:avLst/>
+            </a:prstGeom>
+            <a:solidFill>
+              <a:srgbClr val="1A3773"/>
+            </a:solidFill>
+            <a:ln>
+              <a:solidFill>
+                <a:srgbClr val="1A3773"/>
+              </a:solidFill>
+            </a:ln>
+          </p:spPr>
+          <p:style>
+            <a:lnRef idx="2">
+              <a:schemeClr val="accent1">
+                <a:shade val="15000"/>
+              </a:schemeClr>
+            </a:lnRef>
+            <a:fillRef idx="1">
+              <a:schemeClr val="accent1"/>
+            </a:fillRef>
+            <a:effectRef idx="0">
+              <a:schemeClr val="accent1"/>
+            </a:effectRef>
+            <a:fontRef idx="minor">
+              <a:schemeClr val="lt1"/>
+            </a:fontRef>
+          </p:style>
+          <p:txBody>
+            <a:bodyPr rtlCol="0" anchor="ctr"/>
+            <a:lstStyle/>
+            <a:p>
+              <a:pPr algn="ctr"/>
+              <a:endParaRPr lang="en-US"/>
+            </a:p>
+          </p:txBody>
+        </p:sp>
+        <p:sp>
+          <p:nvSpPr>
+            <p:cNvPr id="17" name="TextBox 16">
+              <a:extLst>
+                <a:ext uri="{FF2B5EF4-FFF2-40B4-BE49-F238E27FC236}">
+                  <a16:creationId xmlns:a16="http://schemas.microsoft.com/office/drawing/2014/main" id="{D674F850-AC07-6A46-66F1-559C1E1435D4}"/>
+                </a:ext>
+              </a:extLst>
+            </p:cNvPr>
+            <p:cNvSpPr txBox="1"/>
+            <p:nvPr/>
+          </p:nvSpPr>
+          <p:spPr>
+            <a:xfrm>
+              <a:off x="11508348" y="6199977"/>
+              <a:ext cx="368600" cy="387737"/>
+            </a:xfrm>
+            <a:prstGeom prst="rect">
+              <a:avLst/>
+            </a:prstGeom>
+            <a:noFill/>
+          </p:spPr>
+          <p:txBody>
+            <a:bodyPr wrap="square" rtlCol="0">
+              <a:spAutoFit/>
+            </a:bodyPr>
+            <a:lstStyle/>
+            <a:p>
+              <a:pPr algn="ctr"/>
+              <a:r>
+                <a:rPr lang="ru-RU" sz="1400" dirty="0">
+                  <a:solidFill>
+                    <a:schemeClr val="bg1"/>
+                  </a:solidFill>
+                  <a:latin typeface="Inter Variable Text" panose="02000503000000020004" pitchFamily="2" charset="0"/>
+                  <a:ea typeface="Inter Variable Text" panose="02000503000000020004" pitchFamily="2" charset="0"/>
+                  <a:cs typeface="Inter Variable Text" panose="02000503000000020004" pitchFamily="2" charset="0"/>
+                </a:rPr>
+                <a:t>9</a:t>
+              </a:r>
+              <a:endParaRPr lang="en-US" sz="1400" dirty="0">
+                <a:solidFill>
+                  <a:schemeClr val="bg1"/>
+                </a:solidFill>
+                <a:latin typeface="Inter Variable Text" panose="02000503000000020004" pitchFamily="2" charset="0"/>
+                <a:ea typeface="Inter Variable Text" panose="02000503000000020004" pitchFamily="2" charset="0"/>
+                <a:cs typeface="Inter Variable Text" panose="02000503000000020004" pitchFamily="2" charset="0"/>
+              </a:endParaRPr>
+            </a:p>
+          </p:txBody>
+        </p:sp>
+      </p:grpSp>
+      <p:pic>
+        <p:nvPicPr>
+          <p:cNvPr id="4" name="Рисунок 3">
+            <a:extLst>
+              <a:ext uri="{FF2B5EF4-FFF2-40B4-BE49-F238E27FC236}">
+                <a16:creationId xmlns:a16="http://schemas.microsoft.com/office/drawing/2014/main" id="{CC0B5D89-BB96-BD11-3F2A-700B99F15E77}"/>
+              </a:ext>
+            </a:extLst>
+          </p:cNvPr>
+          <p:cNvPicPr>
+            <a:picLocks noChangeAspect="1"/>
+          </p:cNvPicPr>
+          <p:nvPr/>
+        </p:nvPicPr>
+        <p:blipFill>
+          <a:blip r:embed="rId4"/>
+          <a:stretch>
+            <a:fillRect/>
+          </a:stretch>
+        </p:blipFill>
+        <p:spPr bwMode="auto">
+          <a:xfrm>
+            <a:off x="751474" y="3651538"/>
+            <a:ext cx="4142668" cy="2812532"/>
+          </a:xfrm>
+          <a:prstGeom prst="rect">
+            <a:avLst/>
+          </a:prstGeom>
+          <a:noFill/>
+        </p:spPr>
+      </p:pic>
+      <p:pic>
+        <p:nvPicPr>
+          <p:cNvPr id="5" name="Рисунок 4">
+            <a:extLst>
+              <a:ext uri="{FF2B5EF4-FFF2-40B4-BE49-F238E27FC236}">
+                <a16:creationId xmlns:a16="http://schemas.microsoft.com/office/drawing/2014/main" id="{523F514C-711F-766C-2086-E6571F058412}"/>
+              </a:ext>
+            </a:extLst>
+          </p:cNvPr>
+          <p:cNvPicPr>
+            <a:picLocks noChangeAspect="1"/>
+          </p:cNvPicPr>
+          <p:nvPr/>
+        </p:nvPicPr>
+        <p:blipFill>
+          <a:blip r:embed="rId5"/>
+          <a:stretch>
+            <a:fillRect/>
+          </a:stretch>
+        </p:blipFill>
+        <p:spPr bwMode="auto">
+          <a:xfrm>
+            <a:off x="804113" y="1225929"/>
+            <a:ext cx="4008292" cy="2078813"/>
+          </a:xfrm>
+          <a:prstGeom prst="rect">
+            <a:avLst/>
+          </a:prstGeom>
+          <a:noFill/>
+        </p:spPr>
+      </p:pic>
+      <p:pic>
+        <p:nvPicPr>
+          <p:cNvPr id="3" name="Рисунок 2">
+            <a:extLst>
+              <a:ext uri="{FF2B5EF4-FFF2-40B4-BE49-F238E27FC236}">
+                <a16:creationId xmlns:a16="http://schemas.microsoft.com/office/drawing/2014/main" id="{82B31445-3F3B-D895-D3FC-B8E967D4014E}"/>
+              </a:ext>
+            </a:extLst>
+          </p:cNvPr>
+          <p:cNvPicPr>
+            <a:picLocks noChangeAspect="1"/>
+          </p:cNvPicPr>
+          <p:nvPr/>
+        </p:nvPicPr>
+        <p:blipFill>
+          <a:blip r:embed="rId6"/>
+          <a:stretch>
+            <a:fillRect/>
+          </a:stretch>
+        </p:blipFill>
+        <p:spPr bwMode="auto">
+          <a:xfrm>
+            <a:off x="6515092" y="1145109"/>
+            <a:ext cx="3474488" cy="2968114"/>
+          </a:xfrm>
+          <a:prstGeom prst="rect">
+            <a:avLst/>
+          </a:prstGeom>
+          <a:noFill/>
+        </p:spPr>
+      </p:pic>
+      <p:pic>
+        <p:nvPicPr>
+          <p:cNvPr id="7" name="Рисунок 6">
+            <a:extLst>
+              <a:ext uri="{FF2B5EF4-FFF2-40B4-BE49-F238E27FC236}">
+                <a16:creationId xmlns:a16="http://schemas.microsoft.com/office/drawing/2014/main" id="{FEC09B80-64A6-096C-8005-C62508341819}"/>
+              </a:ext>
+            </a:extLst>
+          </p:cNvPr>
+          <p:cNvPicPr>
+            <a:picLocks noChangeAspect="1"/>
+          </p:cNvPicPr>
+          <p:nvPr/>
+        </p:nvPicPr>
+        <p:blipFill>
+          <a:blip r:embed="rId7"/>
+          <a:stretch>
+            <a:fillRect/>
+          </a:stretch>
+        </p:blipFill>
+        <p:spPr bwMode="auto">
+          <a:xfrm>
+            <a:off x="6259201" y="4393327"/>
+            <a:ext cx="4116878" cy="2070743"/>
+          </a:xfrm>
+          <a:prstGeom prst="rect">
+            <a:avLst/>
+          </a:prstGeom>
+          <a:noFill/>
+        </p:spPr>
+      </p:pic>
+      <p:sp>
+        <p:nvSpPr>
+          <p:cNvPr id="8" name="Объект 2">
+            <a:extLst>
+              <a:ext uri="{FF2B5EF4-FFF2-40B4-BE49-F238E27FC236}">
+                <a16:creationId xmlns:a16="http://schemas.microsoft.com/office/drawing/2014/main" id="{AF283E3C-D131-8CA9-19B7-3B94665C1F16}"/>
+              </a:ext>
+            </a:extLst>
+          </p:cNvPr>
+          <p:cNvSpPr txBox="1">
+            <a:spLocks/>
+          </p:cNvSpPr>
+          <p:nvPr/>
+        </p:nvSpPr>
+        <p:spPr>
+          <a:xfrm>
+            <a:off x="300037" y="1045113"/>
+            <a:ext cx="5036109" cy="2383887"/>
+          </a:xfrm>
+          <a:prstGeom prst="roundRect">
+            <a:avLst>
+              <a:gd name="adj" fmla="val 4817"/>
+            </a:avLst>
+          </a:prstGeom>
+          <a:ln w="12700">
+            <a:solidFill>
+              <a:srgbClr val="1A3773"/>
+            </a:solidFill>
+            <a:prstDash val="dash"/>
+          </a:ln>
+        </p:spPr>
+        <p:txBody>
+          <a:bodyPr anchor="ctr"/>
+          <a:lstStyle>
+            <a:lvl1pPr marL="0" indent="0" algn="ctr" defTabSz="914400" rtl="0" eaLnBrk="1" latinLnBrk="0" hangingPunct="1">
+              <a:lnSpc>
+                <a:spcPct val="90000"/>
+              </a:lnSpc>
+              <a:spcBef>
+                <a:spcPts val="1000"/>
+              </a:spcBef>
+              <a:buFont typeface="Arial"/>
+              <a:buNone/>
+              <a:defRPr sz="2800" b="0" i="0" kern="1200">
+                <a:solidFill>
+                  <a:schemeClr val="tx1">
+                    <a:lumMod val="85000"/>
+                    <a:lumOff val="15000"/>
+                  </a:schemeClr>
+                </a:solidFill>
+                <a:latin typeface="+mn-lt"/>
+                <a:ea typeface="Open Sans Light" charset="0"/>
+                <a:cs typeface="Open Sans Light" charset="0"/>
+              </a:defRPr>
+            </a:lvl1pPr>
+            <a:lvl2pPr marL="685800" indent="-228600" algn="l" defTabSz="914400" rtl="0" eaLnBrk="1" latinLnBrk="0" hangingPunct="1">
+              <a:lnSpc>
+                <a:spcPct val="90000"/>
+              </a:lnSpc>
+              <a:spcBef>
+                <a:spcPts val="500"/>
+              </a:spcBef>
+              <a:buFont typeface="Arial"/>
+              <a:buChar char="•"/>
+              <a:defRPr sz="2400" b="0" i="0" kern="1200">
+                <a:solidFill>
+                  <a:schemeClr val="tx1"/>
+                </a:solidFill>
+                <a:latin typeface="+mn-lt"/>
+                <a:ea typeface="Open Sans Light" charset="0"/>
+                <a:cs typeface="Open Sans Light" charset="0"/>
+              </a:defRPr>
+            </a:lvl2pPr>
+            <a:lvl3pPr marL="1143000" indent="-228600" algn="l" defTabSz="914400" rtl="0" eaLnBrk="1" latinLnBrk="0" hangingPunct="1">
+              <a:lnSpc>
+                <a:spcPct val="90000"/>
+              </a:lnSpc>
+              <a:spcBef>
+                <a:spcPts val="500"/>
+              </a:spcBef>
+              <a:buFont typeface="Arial"/>
+              <a:buChar char="•"/>
+              <a:defRPr sz="2000" b="0" i="0" kern="1200">
+                <a:solidFill>
+                  <a:schemeClr val="tx1"/>
+                </a:solidFill>
+                <a:latin typeface="+mn-lt"/>
+                <a:ea typeface="Open Sans Light" charset="0"/>
+                <a:cs typeface="Open Sans Light" charset="0"/>
+              </a:defRPr>
+            </a:lvl3pPr>
+            <a:lvl4pPr marL="1600200" indent="-228600" algn="l" defTabSz="914400" rtl="0" eaLnBrk="1" latinLnBrk="0" hangingPunct="1">
+              <a:lnSpc>
+                <a:spcPct val="90000"/>
+              </a:lnSpc>
+              <a:spcBef>
+                <a:spcPts val="500"/>
+              </a:spcBef>
+              <a:buFont typeface="Arial"/>
+              <a:buChar char="•"/>
+              <a:defRPr sz="1800" b="0" i="0" kern="1200">
+                <a:solidFill>
+                  <a:schemeClr val="tx1"/>
+                </a:solidFill>
+                <a:latin typeface="+mn-lt"/>
+                <a:ea typeface="Open Sans Light" charset="0"/>
+                <a:cs typeface="Open Sans Light" charset="0"/>
+              </a:defRPr>
+            </a:lvl4pPr>
+            <a:lvl5pPr marL="2057400" indent="-228600" algn="l" defTabSz="914400" rtl="0" eaLnBrk="1" latinLnBrk="0" hangingPunct="1">
+              <a:lnSpc>
+                <a:spcPct val="90000"/>
+              </a:lnSpc>
+              <a:spcBef>
+                <a:spcPts val="500"/>
+              </a:spcBef>
+              <a:buFont typeface="Arial"/>
+              <a:buChar char="•"/>
+              <a:defRPr sz="1800" b="0" i="0" kern="1200">
+                <a:solidFill>
+                  <a:schemeClr val="tx1"/>
+                </a:solidFill>
+                <a:latin typeface="+mn-lt"/>
+                <a:ea typeface="Open Sans Light" charset="0"/>
+                <a:cs typeface="Open Sans Light" charset="0"/>
+              </a:defRPr>
+            </a:lvl5pPr>
+            <a:lvl6pPr marL="2514600" indent="-228600" algn="l" defTabSz="914400" rtl="0" eaLnBrk="1" latinLnBrk="0" hangingPunct="1">
+              <a:lnSpc>
+                <a:spcPct val="90000"/>
+              </a:lnSpc>
+              <a:spcBef>
+                <a:spcPts val="500"/>
+              </a:spcBef>
+              <a:buFont typeface="Arial"/>
+              <a:buChar char="•"/>
+              <a:defRPr sz="1800" kern="1200">
+                <a:solidFill>
+                  <a:schemeClr val="tx1"/>
+                </a:solidFill>
+                <a:latin typeface="+mn-lt"/>
+                <a:ea typeface="+mn-ea"/>
+                <a:cs typeface="+mn-cs"/>
+              </a:defRPr>
+            </a:lvl6pPr>
+            <a:lvl7pPr marL="2971800" indent="-228600" algn="l" defTabSz="914400" rtl="0" eaLnBrk="1" latinLnBrk="0" hangingPunct="1">
+              <a:lnSpc>
+                <a:spcPct val="90000"/>
+              </a:lnSpc>
+              <a:spcBef>
+                <a:spcPts val="500"/>
+              </a:spcBef>
+              <a:buFont typeface="Arial"/>
+              <a:buChar char="•"/>
+              <a:defRPr sz="1800" kern="1200">
+                <a:solidFill>
+                  <a:schemeClr val="tx1"/>
+                </a:solidFill>
+                <a:latin typeface="+mn-lt"/>
+                <a:ea typeface="+mn-ea"/>
+                <a:cs typeface="+mn-cs"/>
+              </a:defRPr>
+            </a:lvl7pPr>
+            <a:lvl8pPr marL="3429000" indent="-228600" algn="l" defTabSz="914400" rtl="0" eaLnBrk="1" latinLnBrk="0" hangingPunct="1">
+              <a:lnSpc>
+                <a:spcPct val="90000"/>
+              </a:lnSpc>
+              <a:spcBef>
+                <a:spcPts val="500"/>
+              </a:spcBef>
+              <a:buFont typeface="Arial"/>
+              <a:buChar char="•"/>
+              <a:defRPr sz="1800" kern="1200">
+                <a:solidFill>
+                  <a:schemeClr val="tx1"/>
+                </a:solidFill>
+                <a:latin typeface="+mn-lt"/>
+                <a:ea typeface="+mn-ea"/>
+                <a:cs typeface="+mn-cs"/>
+              </a:defRPr>
+            </a:lvl8pPr>
+            <a:lvl9pPr marL="3886200" indent="-228600" algn="l" defTabSz="914400" rtl="0" eaLnBrk="1" latinLnBrk="0" hangingPunct="1">
+              <a:lnSpc>
+                <a:spcPct val="90000"/>
+              </a:lnSpc>
+              <a:spcBef>
+                <a:spcPts val="500"/>
+              </a:spcBef>
+              <a:buFont typeface="Arial"/>
+              <a:buChar char="•"/>
+              <a:defRPr sz="1800" kern="1200">
+                <a:solidFill>
+                  <a:schemeClr val="tx1"/>
+                </a:solidFill>
+                <a:latin typeface="+mn-lt"/>
+                <a:ea typeface="+mn-ea"/>
+                <a:cs typeface="+mn-cs"/>
+              </a:defRPr>
+            </a:lvl9pPr>
+          </a:lstStyle>
+          <a:p>
+            <a:endParaRPr lang="ru-RU" sz="2400"/>
+          </a:p>
+        </p:txBody>
+      </p:sp>
+      <p:sp>
+        <p:nvSpPr>
+          <p:cNvPr id="9" name="Объект 2">
+            <a:extLst>
+              <a:ext uri="{FF2B5EF4-FFF2-40B4-BE49-F238E27FC236}">
+                <a16:creationId xmlns:a16="http://schemas.microsoft.com/office/drawing/2014/main" id="{F8773269-FD44-8D4C-3BD3-5D003D46E930}"/>
+              </a:ext>
+            </a:extLst>
+          </p:cNvPr>
+          <p:cNvSpPr txBox="1">
+            <a:spLocks/>
+          </p:cNvSpPr>
+          <p:nvPr/>
+        </p:nvSpPr>
+        <p:spPr>
+          <a:xfrm>
+            <a:off x="310917" y="3553924"/>
+            <a:ext cx="5025230" cy="2968114"/>
+          </a:xfrm>
+          <a:prstGeom prst="roundRect">
+            <a:avLst>
+              <a:gd name="adj" fmla="val 4817"/>
+            </a:avLst>
+          </a:prstGeom>
+          <a:ln w="12700">
+            <a:solidFill>
+              <a:srgbClr val="1A3773"/>
+            </a:solidFill>
+            <a:prstDash val="dash"/>
+          </a:ln>
+        </p:spPr>
+        <p:txBody>
+          <a:bodyPr anchor="ctr"/>
+          <a:lstStyle>
+            <a:lvl1pPr marL="0" indent="0" algn="ctr" defTabSz="914400" rtl="0" eaLnBrk="1" latinLnBrk="0" hangingPunct="1">
+              <a:lnSpc>
+                <a:spcPct val="90000"/>
+              </a:lnSpc>
+              <a:spcBef>
+                <a:spcPts val="1000"/>
+              </a:spcBef>
+              <a:buFont typeface="Arial"/>
+              <a:buNone/>
+              <a:defRPr sz="2800" b="0" i="0" kern="1200">
+                <a:solidFill>
+                  <a:schemeClr val="tx1">
+                    <a:lumMod val="85000"/>
+                    <a:lumOff val="15000"/>
+                  </a:schemeClr>
+                </a:solidFill>
+                <a:latin typeface="+mn-lt"/>
+                <a:ea typeface="Open Sans Light" charset="0"/>
+                <a:cs typeface="Open Sans Light" charset="0"/>
+              </a:defRPr>
+            </a:lvl1pPr>
+            <a:lvl2pPr marL="685800" indent="-228600" algn="l" defTabSz="914400" rtl="0" eaLnBrk="1" latinLnBrk="0" hangingPunct="1">
+              <a:lnSpc>
+                <a:spcPct val="90000"/>
+              </a:lnSpc>
+              <a:spcBef>
+                <a:spcPts val="500"/>
+              </a:spcBef>
+              <a:buFont typeface="Arial"/>
+              <a:buChar char="•"/>
+              <a:defRPr sz="2400" b="0" i="0" kern="1200">
+                <a:solidFill>
+                  <a:schemeClr val="tx1"/>
+                </a:solidFill>
+                <a:latin typeface="+mn-lt"/>
+                <a:ea typeface="Open Sans Light" charset="0"/>
+                <a:cs typeface="Open Sans Light" charset="0"/>
+              </a:defRPr>
+            </a:lvl2pPr>
+            <a:lvl3pPr marL="1143000" indent="-228600" algn="l" defTabSz="914400" rtl="0" eaLnBrk="1" latinLnBrk="0" hangingPunct="1">
+              <a:lnSpc>
+                <a:spcPct val="90000"/>
+              </a:lnSpc>
+              <a:spcBef>
+                <a:spcPts val="500"/>
+              </a:spcBef>
+              <a:buFont typeface="Arial"/>
+              <a:buChar char="•"/>
+              <a:defRPr sz="2000" b="0" i="0" kern="1200">
+                <a:solidFill>
+                  <a:schemeClr val="tx1"/>
+                </a:solidFill>
+                <a:latin typeface="+mn-lt"/>
+                <a:ea typeface="Open Sans Light" charset="0"/>
+                <a:cs typeface="Open Sans Light" charset="0"/>
+              </a:defRPr>
+            </a:lvl3pPr>
+            <a:lvl4pPr marL="1600200" indent="-228600" algn="l" defTabSz="914400" rtl="0" eaLnBrk="1" latinLnBrk="0" hangingPunct="1">
+              <a:lnSpc>
+                <a:spcPct val="90000"/>
+              </a:lnSpc>
+              <a:spcBef>
+                <a:spcPts val="500"/>
+              </a:spcBef>
+              <a:buFont typeface="Arial"/>
+              <a:buChar char="•"/>
+              <a:defRPr sz="1800" b="0" i="0" kern="1200">
+                <a:solidFill>
+                  <a:schemeClr val="tx1"/>
+                </a:solidFill>
+                <a:latin typeface="+mn-lt"/>
+                <a:ea typeface="Open Sans Light" charset="0"/>
+                <a:cs typeface="Open Sans Light" charset="0"/>
+              </a:defRPr>
+            </a:lvl4pPr>
+            <a:lvl5pPr marL="2057400" indent="-228600" algn="l" defTabSz="914400" rtl="0" eaLnBrk="1" latinLnBrk="0" hangingPunct="1">
+              <a:lnSpc>
+                <a:spcPct val="90000"/>
+              </a:lnSpc>
+              <a:spcBef>
+                <a:spcPts val="500"/>
+              </a:spcBef>
+              <a:buFont typeface="Arial"/>
+              <a:buChar char="•"/>
+              <a:defRPr sz="1800" b="0" i="0" kern="1200">
+                <a:solidFill>
+                  <a:schemeClr val="tx1"/>
+                </a:solidFill>
+                <a:latin typeface="+mn-lt"/>
+                <a:ea typeface="Open Sans Light" charset="0"/>
+                <a:cs typeface="Open Sans Light" charset="0"/>
+              </a:defRPr>
+            </a:lvl5pPr>
+            <a:lvl6pPr marL="2514600" indent="-228600" algn="l" defTabSz="914400" rtl="0" eaLnBrk="1" latinLnBrk="0" hangingPunct="1">
+              <a:lnSpc>
+                <a:spcPct val="90000"/>
+              </a:lnSpc>
+              <a:spcBef>
+                <a:spcPts val="500"/>
+              </a:spcBef>
+              <a:buFont typeface="Arial"/>
+              <a:buChar char="•"/>
+              <a:defRPr sz="1800" kern="1200">
+                <a:solidFill>
+                  <a:schemeClr val="tx1"/>
+                </a:solidFill>
+                <a:latin typeface="+mn-lt"/>
+                <a:ea typeface="+mn-ea"/>
+                <a:cs typeface="+mn-cs"/>
+              </a:defRPr>
+            </a:lvl6pPr>
+            <a:lvl7pPr marL="2971800" indent="-228600" algn="l" defTabSz="914400" rtl="0" eaLnBrk="1" latinLnBrk="0" hangingPunct="1">
+              <a:lnSpc>
+                <a:spcPct val="90000"/>
+              </a:lnSpc>
+              <a:spcBef>
+                <a:spcPts val="500"/>
+              </a:spcBef>
+              <a:buFont typeface="Arial"/>
+              <a:buChar char="•"/>
+              <a:defRPr sz="1800" kern="1200">
+                <a:solidFill>
+                  <a:schemeClr val="tx1"/>
+                </a:solidFill>
+                <a:latin typeface="+mn-lt"/>
+                <a:ea typeface="+mn-ea"/>
+                <a:cs typeface="+mn-cs"/>
+              </a:defRPr>
+            </a:lvl7pPr>
+            <a:lvl8pPr marL="3429000" indent="-228600" algn="l" defTabSz="914400" rtl="0" eaLnBrk="1" latinLnBrk="0" hangingPunct="1">
+              <a:lnSpc>
+                <a:spcPct val="90000"/>
+              </a:lnSpc>
+              <a:spcBef>
+                <a:spcPts val="500"/>
+              </a:spcBef>
+              <a:buFont typeface="Arial"/>
+              <a:buChar char="•"/>
+              <a:defRPr sz="1800" kern="1200">
+                <a:solidFill>
+                  <a:schemeClr val="tx1"/>
+                </a:solidFill>
+                <a:latin typeface="+mn-lt"/>
+                <a:ea typeface="+mn-ea"/>
+                <a:cs typeface="+mn-cs"/>
+              </a:defRPr>
+            </a:lvl8pPr>
+            <a:lvl9pPr marL="3886200" indent="-228600" algn="l" defTabSz="914400" rtl="0" eaLnBrk="1" latinLnBrk="0" hangingPunct="1">
+              <a:lnSpc>
+                <a:spcPct val="90000"/>
+              </a:lnSpc>
+              <a:spcBef>
+                <a:spcPts val="500"/>
+              </a:spcBef>
+              <a:buFont typeface="Arial"/>
+              <a:buChar char="•"/>
+              <a:defRPr sz="1800" kern="1200">
+                <a:solidFill>
+                  <a:schemeClr val="tx1"/>
+                </a:solidFill>
+                <a:latin typeface="+mn-lt"/>
+                <a:ea typeface="+mn-ea"/>
+                <a:cs typeface="+mn-cs"/>
+              </a:defRPr>
+            </a:lvl9pPr>
+          </a:lstStyle>
+          <a:p>
+            <a:endParaRPr lang="ru-RU" sz="2400"/>
+          </a:p>
+        </p:txBody>
+      </p:sp>
+      <p:sp>
+        <p:nvSpPr>
+          <p:cNvPr id="10" name="Объект 2">
+            <a:extLst>
+              <a:ext uri="{FF2B5EF4-FFF2-40B4-BE49-F238E27FC236}">
+                <a16:creationId xmlns:a16="http://schemas.microsoft.com/office/drawing/2014/main" id="{14C36D96-A3CC-646E-7F18-B55605A90EAC}"/>
+              </a:ext>
+            </a:extLst>
+          </p:cNvPr>
+          <p:cNvSpPr txBox="1">
+            <a:spLocks/>
+          </p:cNvSpPr>
+          <p:nvPr/>
+        </p:nvSpPr>
+        <p:spPr>
+          <a:xfrm>
+            <a:off x="5573936" y="1045113"/>
+            <a:ext cx="5536239" cy="3168105"/>
+          </a:xfrm>
+          <a:prstGeom prst="roundRect">
+            <a:avLst>
+              <a:gd name="adj" fmla="val 4817"/>
+            </a:avLst>
+          </a:prstGeom>
+          <a:ln w="12700">
+            <a:solidFill>
+              <a:srgbClr val="1A3773"/>
+            </a:solidFill>
+            <a:prstDash val="dash"/>
+          </a:ln>
+        </p:spPr>
+        <p:txBody>
+          <a:bodyPr anchor="ctr"/>
+          <a:lstStyle>
+            <a:lvl1pPr marL="0" indent="0" algn="ctr" defTabSz="914400" rtl="0" eaLnBrk="1" latinLnBrk="0" hangingPunct="1">
+              <a:lnSpc>
+                <a:spcPct val="90000"/>
+              </a:lnSpc>
+              <a:spcBef>
+                <a:spcPts val="1000"/>
+              </a:spcBef>
+              <a:buFont typeface="Arial"/>
+              <a:buNone/>
+              <a:defRPr sz="2800" b="0" i="0" kern="1200">
+                <a:solidFill>
+                  <a:schemeClr val="tx1">
+                    <a:lumMod val="85000"/>
+                    <a:lumOff val="15000"/>
+                  </a:schemeClr>
+                </a:solidFill>
+                <a:latin typeface="+mn-lt"/>
+                <a:ea typeface="Open Sans Light" charset="0"/>
+                <a:cs typeface="Open Sans Light" charset="0"/>
+              </a:defRPr>
+            </a:lvl1pPr>
+            <a:lvl2pPr marL="685800" indent="-228600" algn="l" defTabSz="914400" rtl="0" eaLnBrk="1" latinLnBrk="0" hangingPunct="1">
+              <a:lnSpc>
+                <a:spcPct val="90000"/>
+              </a:lnSpc>
+              <a:spcBef>
+                <a:spcPts val="500"/>
+              </a:spcBef>
+              <a:buFont typeface="Arial"/>
+              <a:buChar char="•"/>
+              <a:defRPr sz="2400" b="0" i="0" kern="1200">
+                <a:solidFill>
+                  <a:schemeClr val="tx1"/>
+                </a:solidFill>
+                <a:latin typeface="+mn-lt"/>
+                <a:ea typeface="Open Sans Light" charset="0"/>
+                <a:cs typeface="Open Sans Light" charset="0"/>
+              </a:defRPr>
+            </a:lvl2pPr>
+            <a:lvl3pPr marL="1143000" indent="-228600" algn="l" defTabSz="914400" rtl="0" eaLnBrk="1" latinLnBrk="0" hangingPunct="1">
+              <a:lnSpc>
+                <a:spcPct val="90000"/>
+              </a:lnSpc>
+              <a:spcBef>
+                <a:spcPts val="500"/>
+              </a:spcBef>
+              <a:buFont typeface="Arial"/>
+              <a:buChar char="•"/>
+              <a:defRPr sz="2000" b="0" i="0" kern="1200">
+                <a:solidFill>
+                  <a:schemeClr val="tx1"/>
+                </a:solidFill>
+                <a:latin typeface="+mn-lt"/>
+                <a:ea typeface="Open Sans Light" charset="0"/>
+                <a:cs typeface="Open Sans Light" charset="0"/>
+              </a:defRPr>
+            </a:lvl3pPr>
+            <a:lvl4pPr marL="1600200" indent="-228600" algn="l" defTabSz="914400" rtl="0" eaLnBrk="1" latinLnBrk="0" hangingPunct="1">
+              <a:lnSpc>
+                <a:spcPct val="90000"/>
+              </a:lnSpc>
+              <a:spcBef>
+                <a:spcPts val="500"/>
+              </a:spcBef>
+              <a:buFont typeface="Arial"/>
+              <a:buChar char="•"/>
+              <a:defRPr sz="1800" b="0" i="0" kern="1200">
+                <a:solidFill>
+                  <a:schemeClr val="tx1"/>
+                </a:solidFill>
+                <a:latin typeface="+mn-lt"/>
+                <a:ea typeface="Open Sans Light" charset="0"/>
+                <a:cs typeface="Open Sans Light" charset="0"/>
+              </a:defRPr>
+            </a:lvl4pPr>
+            <a:lvl5pPr marL="2057400" indent="-228600" algn="l" defTabSz="914400" rtl="0" eaLnBrk="1" latinLnBrk="0" hangingPunct="1">
+              <a:lnSpc>
+                <a:spcPct val="90000"/>
+              </a:lnSpc>
+              <a:spcBef>
+                <a:spcPts val="500"/>
+              </a:spcBef>
+              <a:buFont typeface="Arial"/>
+              <a:buChar char="•"/>
+              <a:defRPr sz="1800" b="0" i="0" kern="1200">
+                <a:solidFill>
+                  <a:schemeClr val="tx1"/>
+                </a:solidFill>
+                <a:latin typeface="+mn-lt"/>
+                <a:ea typeface="Open Sans Light" charset="0"/>
+                <a:cs typeface="Open Sans Light" charset="0"/>
+              </a:defRPr>
+            </a:lvl5pPr>
+            <a:lvl6pPr marL="2514600" indent="-228600" algn="l" defTabSz="914400" rtl="0" eaLnBrk="1" latinLnBrk="0" hangingPunct="1">
+              <a:lnSpc>
+                <a:spcPct val="90000"/>
+              </a:lnSpc>
+              <a:spcBef>
+                <a:spcPts val="500"/>
+              </a:spcBef>
+              <a:buFont typeface="Arial"/>
+              <a:buChar char="•"/>
+              <a:defRPr sz="1800" kern="1200">
+                <a:solidFill>
+                  <a:schemeClr val="tx1"/>
+                </a:solidFill>
+                <a:latin typeface="+mn-lt"/>
+                <a:ea typeface="+mn-ea"/>
+                <a:cs typeface="+mn-cs"/>
+              </a:defRPr>
+            </a:lvl6pPr>
+            <a:lvl7pPr marL="2971800" indent="-228600" algn="l" defTabSz="914400" rtl="0" eaLnBrk="1" latinLnBrk="0" hangingPunct="1">
+              <a:lnSpc>
+                <a:spcPct val="90000"/>
+              </a:lnSpc>
+              <a:spcBef>
+                <a:spcPts val="500"/>
+              </a:spcBef>
+              <a:buFont typeface="Arial"/>
+              <a:buChar char="•"/>
+              <a:defRPr sz="1800" kern="1200">
+                <a:solidFill>
+                  <a:schemeClr val="tx1"/>
+                </a:solidFill>
+                <a:latin typeface="+mn-lt"/>
+                <a:ea typeface="+mn-ea"/>
+                <a:cs typeface="+mn-cs"/>
+              </a:defRPr>
+            </a:lvl7pPr>
+            <a:lvl8pPr marL="3429000" indent="-228600" algn="l" defTabSz="914400" rtl="0" eaLnBrk="1" latinLnBrk="0" hangingPunct="1">
+              <a:lnSpc>
+                <a:spcPct val="90000"/>
+              </a:lnSpc>
+              <a:spcBef>
+                <a:spcPts val="500"/>
+              </a:spcBef>
+              <a:buFont typeface="Arial"/>
+              <a:buChar char="•"/>
+              <a:defRPr sz="1800" kern="1200">
+                <a:solidFill>
+                  <a:schemeClr val="tx1"/>
+                </a:solidFill>
+                <a:latin typeface="+mn-lt"/>
+                <a:ea typeface="+mn-ea"/>
+                <a:cs typeface="+mn-cs"/>
+              </a:defRPr>
+            </a:lvl8pPr>
+            <a:lvl9pPr marL="3886200" indent="-228600" algn="l" defTabSz="914400" rtl="0" eaLnBrk="1" latinLnBrk="0" hangingPunct="1">
+              <a:lnSpc>
+                <a:spcPct val="90000"/>
+              </a:lnSpc>
+              <a:spcBef>
+                <a:spcPts val="500"/>
+              </a:spcBef>
+              <a:buFont typeface="Arial"/>
+              <a:buChar char="•"/>
+              <a:defRPr sz="1800" kern="1200">
+                <a:solidFill>
+                  <a:schemeClr val="tx1"/>
+                </a:solidFill>
+                <a:latin typeface="+mn-lt"/>
+                <a:ea typeface="+mn-ea"/>
+                <a:cs typeface="+mn-cs"/>
+              </a:defRPr>
+            </a:lvl9pPr>
+          </a:lstStyle>
+          <a:p>
+            <a:endParaRPr lang="ru-RU" sz="2400"/>
+          </a:p>
+        </p:txBody>
+      </p:sp>
+      <p:sp>
+        <p:nvSpPr>
+          <p:cNvPr id="11" name="Объект 2">
+            <a:extLst>
+              <a:ext uri="{FF2B5EF4-FFF2-40B4-BE49-F238E27FC236}">
+                <a16:creationId xmlns:a16="http://schemas.microsoft.com/office/drawing/2014/main" id="{E96BD3A3-87C3-D0E4-81C7-DCA2ACAFFF9E}"/>
+              </a:ext>
+            </a:extLst>
+          </p:cNvPr>
+          <p:cNvSpPr txBox="1">
+            <a:spLocks/>
+          </p:cNvSpPr>
+          <p:nvPr/>
+        </p:nvSpPr>
+        <p:spPr>
+          <a:xfrm>
+            <a:off x="5573936" y="4313214"/>
+            <a:ext cx="5536238" cy="2270928"/>
+          </a:xfrm>
+          <a:prstGeom prst="roundRect">
+            <a:avLst>
+              <a:gd name="adj" fmla="val 4817"/>
+            </a:avLst>
+          </a:prstGeom>
+          <a:ln w="12700">
+            <a:solidFill>
+              <a:srgbClr val="1A3773"/>
+            </a:solidFill>
+            <a:prstDash val="dash"/>
+          </a:ln>
+        </p:spPr>
+        <p:txBody>
+          <a:bodyPr anchor="ctr"/>
+          <a:lstStyle>
+            <a:lvl1pPr marL="0" indent="0" algn="ctr" defTabSz="914400" rtl="0" eaLnBrk="1" latinLnBrk="0" hangingPunct="1">
+              <a:lnSpc>
+                <a:spcPct val="90000"/>
+              </a:lnSpc>
+              <a:spcBef>
+                <a:spcPts val="1000"/>
+              </a:spcBef>
+              <a:buFont typeface="Arial"/>
+              <a:buNone/>
+              <a:defRPr sz="2800" b="0" i="0" kern="1200">
+                <a:solidFill>
+                  <a:schemeClr val="tx1">
+                    <a:lumMod val="85000"/>
+                    <a:lumOff val="15000"/>
+                  </a:schemeClr>
+                </a:solidFill>
+                <a:latin typeface="+mn-lt"/>
+                <a:ea typeface="Open Sans Light" charset="0"/>
+                <a:cs typeface="Open Sans Light" charset="0"/>
+              </a:defRPr>
+            </a:lvl1pPr>
+            <a:lvl2pPr marL="685800" indent="-228600" algn="l" defTabSz="914400" rtl="0" eaLnBrk="1" latinLnBrk="0" hangingPunct="1">
+              <a:lnSpc>
+                <a:spcPct val="90000"/>
+              </a:lnSpc>
+              <a:spcBef>
+                <a:spcPts val="500"/>
+              </a:spcBef>
+              <a:buFont typeface="Arial"/>
+              <a:buChar char="•"/>
+              <a:defRPr sz="2400" b="0" i="0" kern="1200">
+                <a:solidFill>
+                  <a:schemeClr val="tx1"/>
+                </a:solidFill>
+                <a:latin typeface="+mn-lt"/>
+                <a:ea typeface="Open Sans Light" charset="0"/>
+                <a:cs typeface="Open Sans Light" charset="0"/>
+              </a:defRPr>
+            </a:lvl2pPr>
+            <a:lvl3pPr marL="1143000" indent="-228600" algn="l" defTabSz="914400" rtl="0" eaLnBrk="1" latinLnBrk="0" hangingPunct="1">
+              <a:lnSpc>
+                <a:spcPct val="90000"/>
+              </a:lnSpc>
+              <a:spcBef>
+                <a:spcPts val="500"/>
+              </a:spcBef>
+              <a:buFont typeface="Arial"/>
+              <a:buChar char="•"/>
+              <a:defRPr sz="2000" b="0" i="0" kern="1200">
+                <a:solidFill>
+                  <a:schemeClr val="tx1"/>
+                </a:solidFill>
+                <a:latin typeface="+mn-lt"/>
+                <a:ea typeface="Open Sans Light" charset="0"/>
+                <a:cs typeface="Open Sans Light" charset="0"/>
+              </a:defRPr>
+            </a:lvl3pPr>
+            <a:lvl4pPr marL="1600200" indent="-228600" algn="l" defTabSz="914400" rtl="0" eaLnBrk="1" latinLnBrk="0" hangingPunct="1">
+              <a:lnSpc>
+                <a:spcPct val="90000"/>
+              </a:lnSpc>
+              <a:spcBef>
+                <a:spcPts val="500"/>
+              </a:spcBef>
+              <a:buFont typeface="Arial"/>
+              <a:buChar char="•"/>
+              <a:defRPr sz="1800" b="0" i="0" kern="1200">
+                <a:solidFill>
+                  <a:schemeClr val="tx1"/>
+                </a:solidFill>
+                <a:latin typeface="+mn-lt"/>
+                <a:ea typeface="Open Sans Light" charset="0"/>
+                <a:cs typeface="Open Sans Light" charset="0"/>
+              </a:defRPr>
+            </a:lvl4pPr>
+            <a:lvl5pPr marL="2057400" indent="-228600" algn="l" defTabSz="914400" rtl="0" eaLnBrk="1" latinLnBrk="0" hangingPunct="1">
+              <a:lnSpc>
+                <a:spcPct val="90000"/>
+              </a:lnSpc>
+              <a:spcBef>
+                <a:spcPts val="500"/>
+              </a:spcBef>
+              <a:buFont typeface="Arial"/>
+              <a:buChar char="•"/>
+              <a:defRPr sz="1800" b="0" i="0" kern="1200">
+                <a:solidFill>
+                  <a:schemeClr val="tx1"/>
+                </a:solidFill>
+                <a:latin typeface="+mn-lt"/>
+                <a:ea typeface="Open Sans Light" charset="0"/>
+                <a:cs typeface="Open Sans Light" charset="0"/>
+              </a:defRPr>
+            </a:lvl5pPr>
+            <a:lvl6pPr marL="2514600" indent="-228600" algn="l" defTabSz="914400" rtl="0" eaLnBrk="1" latinLnBrk="0" hangingPunct="1">
+              <a:lnSpc>
+                <a:spcPct val="90000"/>
+              </a:lnSpc>
+              <a:spcBef>
+                <a:spcPts val="500"/>
+              </a:spcBef>
+              <a:buFont typeface="Arial"/>
+              <a:buChar char="•"/>
+              <a:defRPr sz="1800" kern="1200">
+                <a:solidFill>
+                  <a:schemeClr val="tx1"/>
+                </a:solidFill>
+                <a:latin typeface="+mn-lt"/>
+                <a:ea typeface="+mn-ea"/>
+                <a:cs typeface="+mn-cs"/>
+              </a:defRPr>
+            </a:lvl6pPr>
+            <a:lvl7pPr marL="2971800" indent="-228600" algn="l" defTabSz="914400" rtl="0" eaLnBrk="1" latinLnBrk="0" hangingPunct="1">
+              <a:lnSpc>
+                <a:spcPct val="90000"/>
+              </a:lnSpc>
+              <a:spcBef>
+                <a:spcPts val="500"/>
+              </a:spcBef>
+              <a:buFont typeface="Arial"/>
+              <a:buChar char="•"/>
+              <a:defRPr sz="1800" kern="1200">
+                <a:solidFill>
+                  <a:schemeClr val="tx1"/>
+                </a:solidFill>
+                <a:latin typeface="+mn-lt"/>
+                <a:ea typeface="+mn-ea"/>
+                <a:cs typeface="+mn-cs"/>
+              </a:defRPr>
+            </a:lvl7pPr>
+            <a:lvl8pPr marL="3429000" indent="-228600" algn="l" defTabSz="914400" rtl="0" eaLnBrk="1" latinLnBrk="0" hangingPunct="1">
+              <a:lnSpc>
+                <a:spcPct val="90000"/>
+              </a:lnSpc>
+              <a:spcBef>
+                <a:spcPts val="500"/>
+              </a:spcBef>
+              <a:buFont typeface="Arial"/>
+              <a:buChar char="•"/>
+              <a:defRPr sz="1800" kern="1200">
+                <a:solidFill>
+                  <a:schemeClr val="tx1"/>
+                </a:solidFill>
+                <a:latin typeface="+mn-lt"/>
+                <a:ea typeface="+mn-ea"/>
+                <a:cs typeface="+mn-cs"/>
+              </a:defRPr>
+            </a:lvl8pPr>
+            <a:lvl9pPr marL="3886200" indent="-228600" algn="l" defTabSz="914400" rtl="0" eaLnBrk="1" latinLnBrk="0" hangingPunct="1">
+              <a:lnSpc>
+                <a:spcPct val="90000"/>
+              </a:lnSpc>
+              <a:spcBef>
+                <a:spcPts val="500"/>
+              </a:spcBef>
+              <a:buFont typeface="Arial"/>
+              <a:buChar char="•"/>
+              <a:defRPr sz="1800" kern="1200">
+                <a:solidFill>
+                  <a:schemeClr val="tx1"/>
+                </a:solidFill>
+                <a:latin typeface="+mn-lt"/>
+                <a:ea typeface="+mn-ea"/>
+                <a:cs typeface="+mn-cs"/>
+              </a:defRPr>
+            </a:lvl9pPr>
+          </a:lstStyle>
+          <a:p>
+            <a:endParaRPr lang="ru-RU" sz="2400"/>
+          </a:p>
+        </p:txBody>
+      </p:sp>
+    </p:spTree>
+    <p:extLst>
+      <p:ext uri="{BB962C8B-B14F-4D97-AF65-F5344CB8AC3E}">
+        <p14:creationId xmlns:p14="http://schemas.microsoft.com/office/powerpoint/2010/main" val="2959394858"/>
+      </p:ext>
+    </p:extLst>
+  </p:cSld>
+  <p:clrMapOvr>
+    <a:masterClrMapping/>
+  </p:clrMapOvr>
+</p:sld>
+</file>
+
+<file path=ppt/slides/slide12.xml><?xml version="1.0" encoding="utf-8"?>
+<p:sld xmlns:a="http://schemas.openxmlformats.org/drawingml/2006/main" xmlns:r="http://schemas.openxmlformats.org/officeDocument/2006/relationships" xmlns:p="http://schemas.openxmlformats.org/presentationml/2006/main" show="0">
   <p:cSld>
     <p:spTree>
       <p:nvGrpSpPr>
@@ -12523,8 +15402,273 @@
 </p:sld>
 </file>
 
-<file path=ppt/slides/slide11.xml><?xml version="1.0" encoding="utf-8"?>
+<file path=ppt/slides/slide13.xml><?xml version="1.0" encoding="utf-8"?>
 <p:sld xmlns:a="http://schemas.openxmlformats.org/drawingml/2006/main" xmlns:r="http://schemas.openxmlformats.org/officeDocument/2006/relationships" xmlns:p="http://schemas.openxmlformats.org/presentationml/2006/main">
+  <p:cSld>
+    <p:spTree>
+      <p:nvGrpSpPr>
+        <p:cNvPr id="1" name="">
+          <a:extLst>
+            <a:ext uri="{FF2B5EF4-FFF2-40B4-BE49-F238E27FC236}">
+              <a16:creationId xmlns:a16="http://schemas.microsoft.com/office/drawing/2014/main" id="{E2E51E98-7F3B-C356-C5F9-945E2027533A}"/>
+            </a:ext>
+          </a:extLst>
+        </p:cNvPr>
+        <p:cNvGrpSpPr/>
+        <p:nvPr/>
+      </p:nvGrpSpPr>
+      <p:grpSpPr>
+        <a:xfrm>
+          <a:off x="0" y="0"/>
+          <a:ext cx="0" cy="0"/>
+          <a:chOff x="0" y="0"/>
+          <a:chExt cx="0" cy="0"/>
+        </a:xfrm>
+      </p:grpSpPr>
+      <p:sp>
+        <p:nvSpPr>
+          <p:cNvPr id="6" name="TextBox 5">
+            <a:extLst>
+              <a:ext uri="{FF2B5EF4-FFF2-40B4-BE49-F238E27FC236}">
+                <a16:creationId xmlns:a16="http://schemas.microsoft.com/office/drawing/2014/main" id="{617A54DF-6129-D3D9-3F4D-45065BF248E6}"/>
+              </a:ext>
+            </a:extLst>
+          </p:cNvPr>
+          <p:cNvSpPr txBox="1"/>
+          <p:nvPr/>
+        </p:nvSpPr>
+        <p:spPr>
+          <a:xfrm>
+            <a:off x="3784600" y="273858"/>
+            <a:ext cx="8107363" cy="646331"/>
+          </a:xfrm>
+          <a:prstGeom prst="rect">
+            <a:avLst/>
+          </a:prstGeom>
+          <a:noFill/>
+        </p:spPr>
+        <p:txBody>
+          <a:bodyPr wrap="square" rtlCol="0">
+            <a:spAutoFit/>
+          </a:bodyPr>
+          <a:lstStyle/>
+          <a:p>
+            <a:r>
+              <a:rPr lang="ru-RU" sz="3600" dirty="0">
+                <a:solidFill>
+                  <a:srgbClr val="274E9C"/>
+                </a:solidFill>
+                <a:latin typeface="Inter Variable Text Medium" panose="02000503000000020004" pitchFamily="2" charset="0"/>
+                <a:ea typeface="Inter Variable Text Medium" panose="02000503000000020004" pitchFamily="2" charset="0"/>
+                <a:cs typeface="Inter Variable Text Medium" panose="02000503000000020004" pitchFamily="2" charset="0"/>
+              </a:rPr>
+              <a:t>Результаты эксперимента</a:t>
+            </a:r>
+          </a:p>
+        </p:txBody>
+      </p:sp>
+      <p:pic>
+        <p:nvPicPr>
+          <p:cNvPr id="2" name="Рисунок 1">
+            <a:extLst>
+              <a:ext uri="{FF2B5EF4-FFF2-40B4-BE49-F238E27FC236}">
+                <a16:creationId xmlns:a16="http://schemas.microsoft.com/office/drawing/2014/main" id="{A223ABB9-B77B-9FEC-0975-6BB2D63C3E90}"/>
+              </a:ext>
+            </a:extLst>
+          </p:cNvPr>
+          <p:cNvPicPr>
+            <a:picLocks noChangeAspect="1"/>
+          </p:cNvPicPr>
+          <p:nvPr/>
+        </p:nvPicPr>
+        <p:blipFill>
+          <a:blip r:embed="rId3"/>
+          <a:stretch>
+            <a:fillRect/>
+          </a:stretch>
+        </p:blipFill>
+        <p:spPr>
+          <a:xfrm>
+            <a:off x="300037" y="273858"/>
+            <a:ext cx="2990861" cy="640543"/>
+          </a:xfrm>
+          <a:prstGeom prst="rect">
+            <a:avLst/>
+          </a:prstGeom>
+        </p:spPr>
+      </p:pic>
+      <p:grpSp>
+        <p:nvGrpSpPr>
+          <p:cNvPr id="15" name="Группа 14">
+            <a:extLst>
+              <a:ext uri="{FF2B5EF4-FFF2-40B4-BE49-F238E27FC236}">
+                <a16:creationId xmlns:a16="http://schemas.microsoft.com/office/drawing/2014/main" id="{5145BCBA-734A-17D4-9717-7EF38B1D1976}"/>
+              </a:ext>
+            </a:extLst>
+          </p:cNvPr>
+          <p:cNvGrpSpPr/>
+          <p:nvPr/>
+        </p:nvGrpSpPr>
+        <p:grpSpPr>
+          <a:xfrm>
+            <a:off x="11641128" y="6312477"/>
+            <a:ext cx="490760" cy="490760"/>
+            <a:chOff x="11383518" y="6084717"/>
+            <a:chExt cx="618259" cy="618259"/>
+          </a:xfrm>
+        </p:grpSpPr>
+        <p:sp>
+          <p:nvSpPr>
+            <p:cNvPr id="16" name="Прямоугольник: скругленные углы 15">
+              <a:extLst>
+                <a:ext uri="{FF2B5EF4-FFF2-40B4-BE49-F238E27FC236}">
+                  <a16:creationId xmlns:a16="http://schemas.microsoft.com/office/drawing/2014/main" id="{8744FD80-B5AF-13C8-461F-3C4C02BC9179}"/>
+                </a:ext>
+              </a:extLst>
+            </p:cNvPr>
+            <p:cNvSpPr/>
+            <p:nvPr/>
+          </p:nvSpPr>
+          <p:spPr>
+            <a:xfrm>
+              <a:off x="11383518" y="6084717"/>
+              <a:ext cx="618259" cy="618259"/>
+            </a:xfrm>
+            <a:prstGeom prst="roundRect">
+              <a:avLst/>
+            </a:prstGeom>
+            <a:solidFill>
+              <a:srgbClr val="1A3773"/>
+            </a:solidFill>
+            <a:ln>
+              <a:solidFill>
+                <a:srgbClr val="1A3773"/>
+              </a:solidFill>
+            </a:ln>
+          </p:spPr>
+          <p:style>
+            <a:lnRef idx="2">
+              <a:schemeClr val="accent1">
+                <a:shade val="15000"/>
+              </a:schemeClr>
+            </a:lnRef>
+            <a:fillRef idx="1">
+              <a:schemeClr val="accent1"/>
+            </a:fillRef>
+            <a:effectRef idx="0">
+              <a:schemeClr val="accent1"/>
+            </a:effectRef>
+            <a:fontRef idx="minor">
+              <a:schemeClr val="lt1"/>
+            </a:fontRef>
+          </p:style>
+          <p:txBody>
+            <a:bodyPr rtlCol="0" anchor="ctr"/>
+            <a:lstStyle/>
+            <a:p>
+              <a:pPr algn="ctr"/>
+              <a:endParaRPr lang="en-US"/>
+            </a:p>
+          </p:txBody>
+        </p:sp>
+        <p:sp>
+          <p:nvSpPr>
+            <p:cNvPr id="17" name="TextBox 16">
+              <a:extLst>
+                <a:ext uri="{FF2B5EF4-FFF2-40B4-BE49-F238E27FC236}">
+                  <a16:creationId xmlns:a16="http://schemas.microsoft.com/office/drawing/2014/main" id="{000A95AC-2758-2CC2-1DD7-745482DD3A85}"/>
+                </a:ext>
+              </a:extLst>
+            </p:cNvPr>
+            <p:cNvSpPr txBox="1"/>
+            <p:nvPr/>
+          </p:nvSpPr>
+          <p:spPr>
+            <a:xfrm>
+              <a:off x="11445932" y="6199977"/>
+              <a:ext cx="493429" cy="387737"/>
+            </a:xfrm>
+            <a:prstGeom prst="rect">
+              <a:avLst/>
+            </a:prstGeom>
+            <a:noFill/>
+          </p:spPr>
+          <p:txBody>
+            <a:bodyPr wrap="square" rtlCol="0">
+              <a:spAutoFit/>
+            </a:bodyPr>
+            <a:lstStyle/>
+            <a:p>
+              <a:pPr algn="ctr"/>
+              <a:r>
+                <a:rPr lang="ru-RU" sz="1400" dirty="0">
+                  <a:solidFill>
+                    <a:schemeClr val="bg1"/>
+                  </a:solidFill>
+                  <a:latin typeface="Inter Variable Text" panose="02000503000000020004" pitchFamily="2" charset="0"/>
+                  <a:ea typeface="Inter Variable Text" panose="02000503000000020004" pitchFamily="2" charset="0"/>
+                  <a:cs typeface="Inter Variable Text" panose="02000503000000020004" pitchFamily="2" charset="0"/>
+                </a:rPr>
+                <a:t>10</a:t>
+              </a:r>
+              <a:endParaRPr lang="en-US" sz="1400" dirty="0">
+                <a:solidFill>
+                  <a:schemeClr val="bg1"/>
+                </a:solidFill>
+                <a:latin typeface="Inter Variable Text" panose="02000503000000020004" pitchFamily="2" charset="0"/>
+                <a:ea typeface="Inter Variable Text" panose="02000503000000020004" pitchFamily="2" charset="0"/>
+                <a:cs typeface="Inter Variable Text" panose="02000503000000020004" pitchFamily="2" charset="0"/>
+              </a:endParaRPr>
+            </a:p>
+          </p:txBody>
+        </p:sp>
+      </p:grpSp>
+      <p:pic>
+        <p:nvPicPr>
+          <p:cNvPr id="3" name="Изображение1">
+            <a:extLst>
+              <a:ext uri="{FF2B5EF4-FFF2-40B4-BE49-F238E27FC236}">
+                <a16:creationId xmlns:a16="http://schemas.microsoft.com/office/drawing/2014/main" id="{473B3E38-5FE7-5767-C7AC-D61E23D5751A}"/>
+              </a:ext>
+            </a:extLst>
+          </p:cNvPr>
+          <p:cNvPicPr>
+            <a:picLocks noChangeAspect="1"/>
+          </p:cNvPicPr>
+          <p:nvPr/>
+        </p:nvPicPr>
+        <p:blipFill>
+          <a:blip r:embed="rId4"/>
+          <a:stretch>
+            <a:fillRect/>
+          </a:stretch>
+        </p:blipFill>
+        <p:spPr bwMode="auto">
+          <a:xfrm>
+            <a:off x="1467434" y="1157856"/>
+            <a:ext cx="9257131" cy="5400000"/>
+          </a:xfrm>
+          <a:prstGeom prst="rect">
+            <a:avLst/>
+          </a:prstGeom>
+          <a:noFill/>
+        </p:spPr>
+      </p:pic>
+    </p:spTree>
+    <p:extLst>
+      <p:ext uri="{BB962C8B-B14F-4D97-AF65-F5344CB8AC3E}">
+        <p14:creationId xmlns:p14="http://schemas.microsoft.com/office/powerpoint/2010/main" val="2888939331"/>
+      </p:ext>
+    </p:extLst>
+  </p:cSld>
+  <p:clrMapOvr>
+    <a:masterClrMapping/>
+  </p:clrMapOvr>
+</p:sld>
+</file>
+
+<file path=ppt/slides/slide14.xml><?xml version="1.0" encoding="utf-8"?>
+<p:sld xmlns:a="http://schemas.openxmlformats.org/drawingml/2006/main" xmlns:r="http://schemas.openxmlformats.org/officeDocument/2006/relationships" xmlns:p="http://schemas.openxmlformats.org/presentationml/2006/main" show="0">
   <p:cSld>
     <p:spTree>
       <p:nvGrpSpPr>
@@ -13048,8 +16192,273 @@
 </p:sld>
 </file>
 
-<file path=ppt/slides/slide12.xml><?xml version="1.0" encoding="utf-8"?>
+<file path=ppt/slides/slide15.xml><?xml version="1.0" encoding="utf-8"?>
 <p:sld xmlns:a="http://schemas.openxmlformats.org/drawingml/2006/main" xmlns:r="http://schemas.openxmlformats.org/officeDocument/2006/relationships" xmlns:p="http://schemas.openxmlformats.org/presentationml/2006/main">
+  <p:cSld>
+    <p:spTree>
+      <p:nvGrpSpPr>
+        <p:cNvPr id="1" name="">
+          <a:extLst>
+            <a:ext uri="{FF2B5EF4-FFF2-40B4-BE49-F238E27FC236}">
+              <a16:creationId xmlns:a16="http://schemas.microsoft.com/office/drawing/2014/main" id="{C34427CB-FFD0-DE34-33AD-D75C0CF6BE0F}"/>
+            </a:ext>
+          </a:extLst>
+        </p:cNvPr>
+        <p:cNvGrpSpPr/>
+        <p:nvPr/>
+      </p:nvGrpSpPr>
+      <p:grpSpPr>
+        <a:xfrm>
+          <a:off x="0" y="0"/>
+          <a:ext cx="0" cy="0"/>
+          <a:chOff x="0" y="0"/>
+          <a:chExt cx="0" cy="0"/>
+        </a:xfrm>
+      </p:grpSpPr>
+      <p:sp>
+        <p:nvSpPr>
+          <p:cNvPr id="6" name="TextBox 5">
+            <a:extLst>
+              <a:ext uri="{FF2B5EF4-FFF2-40B4-BE49-F238E27FC236}">
+                <a16:creationId xmlns:a16="http://schemas.microsoft.com/office/drawing/2014/main" id="{664FEB62-66D1-4AC7-7DF2-02CFB471C064}"/>
+              </a:ext>
+            </a:extLst>
+          </p:cNvPr>
+          <p:cNvSpPr txBox="1"/>
+          <p:nvPr/>
+        </p:nvSpPr>
+        <p:spPr>
+          <a:xfrm>
+            <a:off x="3784600" y="273858"/>
+            <a:ext cx="8107363" cy="646331"/>
+          </a:xfrm>
+          <a:prstGeom prst="rect">
+            <a:avLst/>
+          </a:prstGeom>
+          <a:noFill/>
+        </p:spPr>
+        <p:txBody>
+          <a:bodyPr wrap="square" rtlCol="0">
+            <a:spAutoFit/>
+          </a:bodyPr>
+          <a:lstStyle/>
+          <a:p>
+            <a:r>
+              <a:rPr lang="ru-RU" sz="3600" dirty="0">
+                <a:solidFill>
+                  <a:srgbClr val="274E9C"/>
+                </a:solidFill>
+                <a:latin typeface="Inter Variable Text Medium" panose="02000503000000020004" pitchFamily="2" charset="0"/>
+                <a:ea typeface="Inter Variable Text Medium" panose="02000503000000020004" pitchFamily="2" charset="0"/>
+                <a:cs typeface="Inter Variable Text Medium" panose="02000503000000020004" pitchFamily="2" charset="0"/>
+              </a:rPr>
+              <a:t>Результаты эксперимента</a:t>
+            </a:r>
+          </a:p>
+        </p:txBody>
+      </p:sp>
+      <p:pic>
+        <p:nvPicPr>
+          <p:cNvPr id="2" name="Рисунок 1">
+            <a:extLst>
+              <a:ext uri="{FF2B5EF4-FFF2-40B4-BE49-F238E27FC236}">
+                <a16:creationId xmlns:a16="http://schemas.microsoft.com/office/drawing/2014/main" id="{C91608FB-4054-DFA6-BE0C-7715BE4E16B2}"/>
+              </a:ext>
+            </a:extLst>
+          </p:cNvPr>
+          <p:cNvPicPr>
+            <a:picLocks noChangeAspect="1"/>
+          </p:cNvPicPr>
+          <p:nvPr/>
+        </p:nvPicPr>
+        <p:blipFill>
+          <a:blip r:embed="rId3"/>
+          <a:stretch>
+            <a:fillRect/>
+          </a:stretch>
+        </p:blipFill>
+        <p:spPr>
+          <a:xfrm>
+            <a:off x="300037" y="273858"/>
+            <a:ext cx="2990861" cy="640543"/>
+          </a:xfrm>
+          <a:prstGeom prst="rect">
+            <a:avLst/>
+          </a:prstGeom>
+        </p:spPr>
+      </p:pic>
+      <p:pic>
+        <p:nvPicPr>
+          <p:cNvPr id="5" name="Изображение4">
+            <a:extLst>
+              <a:ext uri="{FF2B5EF4-FFF2-40B4-BE49-F238E27FC236}">
+                <a16:creationId xmlns:a16="http://schemas.microsoft.com/office/drawing/2014/main" id="{F24E7128-4616-634B-7371-DE82D11BF9D4}"/>
+              </a:ext>
+            </a:extLst>
+          </p:cNvPr>
+          <p:cNvPicPr>
+            <a:picLocks noChangeAspect="1"/>
+          </p:cNvPicPr>
+          <p:nvPr/>
+        </p:nvPicPr>
+        <p:blipFill>
+          <a:blip r:embed="rId4"/>
+          <a:stretch>
+            <a:fillRect/>
+          </a:stretch>
+        </p:blipFill>
+        <p:spPr bwMode="auto">
+          <a:xfrm>
+            <a:off x="1613745" y="1157856"/>
+            <a:ext cx="9257592" cy="5400000"/>
+          </a:xfrm>
+          <a:prstGeom prst="rect">
+            <a:avLst/>
+          </a:prstGeom>
+          <a:noFill/>
+        </p:spPr>
+      </p:pic>
+      <p:grpSp>
+        <p:nvGrpSpPr>
+          <p:cNvPr id="8" name="Группа 7">
+            <a:extLst>
+              <a:ext uri="{FF2B5EF4-FFF2-40B4-BE49-F238E27FC236}">
+                <a16:creationId xmlns:a16="http://schemas.microsoft.com/office/drawing/2014/main" id="{7AFE8E3F-4C8A-9BD7-C34D-514C19860B58}"/>
+              </a:ext>
+            </a:extLst>
+          </p:cNvPr>
+          <p:cNvGrpSpPr/>
+          <p:nvPr/>
+        </p:nvGrpSpPr>
+        <p:grpSpPr>
+          <a:xfrm>
+            <a:off x="11641128" y="6312477"/>
+            <a:ext cx="490760" cy="490760"/>
+            <a:chOff x="11383518" y="6084717"/>
+            <a:chExt cx="618259" cy="618259"/>
+          </a:xfrm>
+        </p:grpSpPr>
+        <p:sp>
+          <p:nvSpPr>
+            <p:cNvPr id="9" name="Прямоугольник: скругленные углы 8">
+              <a:extLst>
+                <a:ext uri="{FF2B5EF4-FFF2-40B4-BE49-F238E27FC236}">
+                  <a16:creationId xmlns:a16="http://schemas.microsoft.com/office/drawing/2014/main" id="{E126392F-54F9-FA56-7D01-AF07E3AF00AD}"/>
+                </a:ext>
+              </a:extLst>
+            </p:cNvPr>
+            <p:cNvSpPr/>
+            <p:nvPr/>
+          </p:nvSpPr>
+          <p:spPr>
+            <a:xfrm>
+              <a:off x="11383518" y="6084717"/>
+              <a:ext cx="618259" cy="618259"/>
+            </a:xfrm>
+            <a:prstGeom prst="roundRect">
+              <a:avLst/>
+            </a:prstGeom>
+            <a:solidFill>
+              <a:srgbClr val="1A3773"/>
+            </a:solidFill>
+            <a:ln>
+              <a:solidFill>
+                <a:srgbClr val="1A3773"/>
+              </a:solidFill>
+            </a:ln>
+          </p:spPr>
+          <p:style>
+            <a:lnRef idx="2">
+              <a:schemeClr val="accent1">
+                <a:shade val="15000"/>
+              </a:schemeClr>
+            </a:lnRef>
+            <a:fillRef idx="1">
+              <a:schemeClr val="accent1"/>
+            </a:fillRef>
+            <a:effectRef idx="0">
+              <a:schemeClr val="accent1"/>
+            </a:effectRef>
+            <a:fontRef idx="minor">
+              <a:schemeClr val="lt1"/>
+            </a:fontRef>
+          </p:style>
+          <p:txBody>
+            <a:bodyPr rtlCol="0" anchor="ctr"/>
+            <a:lstStyle/>
+            <a:p>
+              <a:pPr algn="ctr"/>
+              <a:endParaRPr lang="en-US"/>
+            </a:p>
+          </p:txBody>
+        </p:sp>
+        <p:sp>
+          <p:nvSpPr>
+            <p:cNvPr id="10" name="TextBox 9">
+              <a:extLst>
+                <a:ext uri="{FF2B5EF4-FFF2-40B4-BE49-F238E27FC236}">
+                  <a16:creationId xmlns:a16="http://schemas.microsoft.com/office/drawing/2014/main" id="{ABEC0E48-59F7-4891-DDA5-52E07F973C1D}"/>
+                </a:ext>
+              </a:extLst>
+            </p:cNvPr>
+            <p:cNvSpPr txBox="1"/>
+            <p:nvPr/>
+          </p:nvSpPr>
+          <p:spPr>
+            <a:xfrm>
+              <a:off x="11445932" y="6199977"/>
+              <a:ext cx="493429" cy="387737"/>
+            </a:xfrm>
+            <a:prstGeom prst="rect">
+              <a:avLst/>
+            </a:prstGeom>
+            <a:noFill/>
+          </p:spPr>
+          <p:txBody>
+            <a:bodyPr wrap="square" rtlCol="0">
+              <a:spAutoFit/>
+            </a:bodyPr>
+            <a:lstStyle/>
+            <a:p>
+              <a:pPr algn="ctr"/>
+              <a:r>
+                <a:rPr lang="ru-RU" sz="1400" dirty="0">
+                  <a:solidFill>
+                    <a:schemeClr val="bg1"/>
+                  </a:solidFill>
+                  <a:latin typeface="Inter Variable Text" panose="02000503000000020004" pitchFamily="2" charset="0"/>
+                  <a:ea typeface="Inter Variable Text" panose="02000503000000020004" pitchFamily="2" charset="0"/>
+                  <a:cs typeface="Inter Variable Text" panose="02000503000000020004" pitchFamily="2" charset="0"/>
+                </a:rPr>
+                <a:t>11</a:t>
+              </a:r>
+              <a:endParaRPr lang="en-US" sz="1400" dirty="0">
+                <a:solidFill>
+                  <a:schemeClr val="bg1"/>
+                </a:solidFill>
+                <a:latin typeface="Inter Variable Text" panose="02000503000000020004" pitchFamily="2" charset="0"/>
+                <a:ea typeface="Inter Variable Text" panose="02000503000000020004" pitchFamily="2" charset="0"/>
+                <a:cs typeface="Inter Variable Text" panose="02000503000000020004" pitchFamily="2" charset="0"/>
+              </a:endParaRPr>
+            </a:p>
+          </p:txBody>
+        </p:sp>
+      </p:grpSp>
+    </p:spTree>
+    <p:extLst>
+      <p:ext uri="{BB962C8B-B14F-4D97-AF65-F5344CB8AC3E}">
+        <p14:creationId xmlns:p14="http://schemas.microsoft.com/office/powerpoint/2010/main" val="424909185"/>
+      </p:ext>
+    </p:extLst>
+  </p:cSld>
+  <p:clrMapOvr>
+    <a:masterClrMapping/>
+  </p:clrMapOvr>
+</p:sld>
+</file>
+
+<file path=ppt/slides/slide16.xml><?xml version="1.0" encoding="utf-8"?>
+<p:sld xmlns:a="http://schemas.openxmlformats.org/drawingml/2006/main" xmlns:r="http://schemas.openxmlformats.org/officeDocument/2006/relationships" xmlns:p="http://schemas.openxmlformats.org/presentationml/2006/main" show="0">
   <p:cSld>
     <p:spTree>
       <p:nvGrpSpPr>
@@ -13577,7 +16986,272 @@
 </p:sld>
 </file>
 
-<file path=ppt/slides/slide13.xml><?xml version="1.0" encoding="utf-8"?>
+<file path=ppt/slides/slide17.xml><?xml version="1.0" encoding="utf-8"?>
+<p:sld xmlns:a="http://schemas.openxmlformats.org/drawingml/2006/main" xmlns:r="http://schemas.openxmlformats.org/officeDocument/2006/relationships" xmlns:p="http://schemas.openxmlformats.org/presentationml/2006/main">
+  <p:cSld>
+    <p:spTree>
+      <p:nvGrpSpPr>
+        <p:cNvPr id="1" name="">
+          <a:extLst>
+            <a:ext uri="{FF2B5EF4-FFF2-40B4-BE49-F238E27FC236}">
+              <a16:creationId xmlns:a16="http://schemas.microsoft.com/office/drawing/2014/main" id="{6A3E194F-A28F-0392-8D27-BAE961370BD2}"/>
+            </a:ext>
+          </a:extLst>
+        </p:cNvPr>
+        <p:cNvGrpSpPr/>
+        <p:nvPr/>
+      </p:nvGrpSpPr>
+      <p:grpSpPr>
+        <a:xfrm>
+          <a:off x="0" y="0"/>
+          <a:ext cx="0" cy="0"/>
+          <a:chOff x="0" y="0"/>
+          <a:chExt cx="0" cy="0"/>
+        </a:xfrm>
+      </p:grpSpPr>
+      <p:sp>
+        <p:nvSpPr>
+          <p:cNvPr id="6" name="TextBox 5">
+            <a:extLst>
+              <a:ext uri="{FF2B5EF4-FFF2-40B4-BE49-F238E27FC236}">
+                <a16:creationId xmlns:a16="http://schemas.microsoft.com/office/drawing/2014/main" id="{C204FC84-7450-64EA-7AAA-CCE8751DAC9C}"/>
+              </a:ext>
+            </a:extLst>
+          </p:cNvPr>
+          <p:cNvSpPr txBox="1"/>
+          <p:nvPr/>
+        </p:nvSpPr>
+        <p:spPr>
+          <a:xfrm>
+            <a:off x="3784600" y="273858"/>
+            <a:ext cx="8107363" cy="646331"/>
+          </a:xfrm>
+          <a:prstGeom prst="rect">
+            <a:avLst/>
+          </a:prstGeom>
+          <a:noFill/>
+        </p:spPr>
+        <p:txBody>
+          <a:bodyPr wrap="square" rtlCol="0">
+            <a:spAutoFit/>
+          </a:bodyPr>
+          <a:lstStyle/>
+          <a:p>
+            <a:r>
+              <a:rPr lang="ru-RU" sz="3600" dirty="0">
+                <a:solidFill>
+                  <a:srgbClr val="274E9C"/>
+                </a:solidFill>
+                <a:latin typeface="Inter Variable Text Medium" panose="02000503000000020004" pitchFamily="2" charset="0"/>
+                <a:ea typeface="Inter Variable Text Medium" panose="02000503000000020004" pitchFamily="2" charset="0"/>
+                <a:cs typeface="Inter Variable Text Medium" panose="02000503000000020004" pitchFamily="2" charset="0"/>
+              </a:rPr>
+              <a:t>Результаты эксперимента</a:t>
+            </a:r>
+          </a:p>
+        </p:txBody>
+      </p:sp>
+      <p:pic>
+        <p:nvPicPr>
+          <p:cNvPr id="2" name="Рисунок 1">
+            <a:extLst>
+              <a:ext uri="{FF2B5EF4-FFF2-40B4-BE49-F238E27FC236}">
+                <a16:creationId xmlns:a16="http://schemas.microsoft.com/office/drawing/2014/main" id="{02DF6234-68CE-A0B2-217B-4001B5FDC96E}"/>
+              </a:ext>
+            </a:extLst>
+          </p:cNvPr>
+          <p:cNvPicPr>
+            <a:picLocks noChangeAspect="1"/>
+          </p:cNvPicPr>
+          <p:nvPr/>
+        </p:nvPicPr>
+        <p:blipFill>
+          <a:blip r:embed="rId3"/>
+          <a:stretch>
+            <a:fillRect/>
+          </a:stretch>
+        </p:blipFill>
+        <p:spPr>
+          <a:xfrm>
+            <a:off x="300037" y="273858"/>
+            <a:ext cx="2990861" cy="640543"/>
+          </a:xfrm>
+          <a:prstGeom prst="rect">
+            <a:avLst/>
+          </a:prstGeom>
+        </p:spPr>
+      </p:pic>
+      <p:pic>
+        <p:nvPicPr>
+          <p:cNvPr id="4" name="Изображение5">
+            <a:extLst>
+              <a:ext uri="{FF2B5EF4-FFF2-40B4-BE49-F238E27FC236}">
+                <a16:creationId xmlns:a16="http://schemas.microsoft.com/office/drawing/2014/main" id="{F23E676C-33C6-B5A7-4A08-F05E6F440251}"/>
+              </a:ext>
+            </a:extLst>
+          </p:cNvPr>
+          <p:cNvPicPr>
+            <a:picLocks noChangeAspect="1"/>
+          </p:cNvPicPr>
+          <p:nvPr/>
+        </p:nvPicPr>
+        <p:blipFill>
+          <a:blip r:embed="rId4"/>
+          <a:stretch>
+            <a:fillRect/>
+          </a:stretch>
+        </p:blipFill>
+        <p:spPr bwMode="auto">
+          <a:xfrm>
+            <a:off x="1508546" y="1157856"/>
+            <a:ext cx="9256969" cy="5400000"/>
+          </a:xfrm>
+          <a:prstGeom prst="rect">
+            <a:avLst/>
+          </a:prstGeom>
+          <a:noFill/>
+        </p:spPr>
+      </p:pic>
+      <p:grpSp>
+        <p:nvGrpSpPr>
+          <p:cNvPr id="9" name="Группа 8">
+            <a:extLst>
+              <a:ext uri="{FF2B5EF4-FFF2-40B4-BE49-F238E27FC236}">
+                <a16:creationId xmlns:a16="http://schemas.microsoft.com/office/drawing/2014/main" id="{0C67186E-4D32-50AE-AC22-0649B10CB980}"/>
+              </a:ext>
+            </a:extLst>
+          </p:cNvPr>
+          <p:cNvGrpSpPr/>
+          <p:nvPr/>
+        </p:nvGrpSpPr>
+        <p:grpSpPr>
+          <a:xfrm>
+            <a:off x="11641128" y="6312477"/>
+            <a:ext cx="490760" cy="490760"/>
+            <a:chOff x="11383518" y="6084717"/>
+            <a:chExt cx="618259" cy="618259"/>
+          </a:xfrm>
+        </p:grpSpPr>
+        <p:sp>
+          <p:nvSpPr>
+            <p:cNvPr id="10" name="Прямоугольник: скругленные углы 9">
+              <a:extLst>
+                <a:ext uri="{FF2B5EF4-FFF2-40B4-BE49-F238E27FC236}">
+                  <a16:creationId xmlns:a16="http://schemas.microsoft.com/office/drawing/2014/main" id="{0DBE2309-6265-1B50-E35F-F3BF15152F1B}"/>
+                </a:ext>
+              </a:extLst>
+            </p:cNvPr>
+            <p:cNvSpPr/>
+            <p:nvPr/>
+          </p:nvSpPr>
+          <p:spPr>
+            <a:xfrm>
+              <a:off x="11383518" y="6084717"/>
+              <a:ext cx="618259" cy="618259"/>
+            </a:xfrm>
+            <a:prstGeom prst="roundRect">
+              <a:avLst/>
+            </a:prstGeom>
+            <a:solidFill>
+              <a:srgbClr val="1A3773"/>
+            </a:solidFill>
+            <a:ln>
+              <a:solidFill>
+                <a:srgbClr val="1A3773"/>
+              </a:solidFill>
+            </a:ln>
+          </p:spPr>
+          <p:style>
+            <a:lnRef idx="2">
+              <a:schemeClr val="accent1">
+                <a:shade val="15000"/>
+              </a:schemeClr>
+            </a:lnRef>
+            <a:fillRef idx="1">
+              <a:schemeClr val="accent1"/>
+            </a:fillRef>
+            <a:effectRef idx="0">
+              <a:schemeClr val="accent1"/>
+            </a:effectRef>
+            <a:fontRef idx="minor">
+              <a:schemeClr val="lt1"/>
+            </a:fontRef>
+          </p:style>
+          <p:txBody>
+            <a:bodyPr rtlCol="0" anchor="ctr"/>
+            <a:lstStyle/>
+            <a:p>
+              <a:pPr algn="ctr"/>
+              <a:endParaRPr lang="en-US"/>
+            </a:p>
+          </p:txBody>
+        </p:sp>
+        <p:sp>
+          <p:nvSpPr>
+            <p:cNvPr id="11" name="TextBox 10">
+              <a:extLst>
+                <a:ext uri="{FF2B5EF4-FFF2-40B4-BE49-F238E27FC236}">
+                  <a16:creationId xmlns:a16="http://schemas.microsoft.com/office/drawing/2014/main" id="{D6B7B761-CD75-5F57-F27B-D1A297A2A1DD}"/>
+                </a:ext>
+              </a:extLst>
+            </p:cNvPr>
+            <p:cNvSpPr txBox="1"/>
+            <p:nvPr/>
+          </p:nvSpPr>
+          <p:spPr>
+            <a:xfrm>
+              <a:off x="11445932" y="6199977"/>
+              <a:ext cx="493429" cy="387737"/>
+            </a:xfrm>
+            <a:prstGeom prst="rect">
+              <a:avLst/>
+            </a:prstGeom>
+            <a:noFill/>
+          </p:spPr>
+          <p:txBody>
+            <a:bodyPr wrap="square" rtlCol="0">
+              <a:spAutoFit/>
+            </a:bodyPr>
+            <a:lstStyle/>
+            <a:p>
+              <a:pPr algn="ctr"/>
+              <a:r>
+                <a:rPr lang="ru-RU" sz="1400" dirty="0">
+                  <a:solidFill>
+                    <a:schemeClr val="bg1"/>
+                  </a:solidFill>
+                  <a:latin typeface="Inter Variable Text" panose="02000503000000020004" pitchFamily="2" charset="0"/>
+                  <a:ea typeface="Inter Variable Text" panose="02000503000000020004" pitchFamily="2" charset="0"/>
+                  <a:cs typeface="Inter Variable Text" panose="02000503000000020004" pitchFamily="2" charset="0"/>
+                </a:rPr>
+                <a:t>12</a:t>
+              </a:r>
+              <a:endParaRPr lang="en-US" sz="1400" dirty="0">
+                <a:solidFill>
+                  <a:schemeClr val="bg1"/>
+                </a:solidFill>
+                <a:latin typeface="Inter Variable Text" panose="02000503000000020004" pitchFamily="2" charset="0"/>
+                <a:ea typeface="Inter Variable Text" panose="02000503000000020004" pitchFamily="2" charset="0"/>
+                <a:cs typeface="Inter Variable Text" panose="02000503000000020004" pitchFamily="2" charset="0"/>
+              </a:endParaRPr>
+            </a:p>
+          </p:txBody>
+        </p:sp>
+      </p:grpSp>
+    </p:spTree>
+    <p:extLst>
+      <p:ext uri="{BB962C8B-B14F-4D97-AF65-F5344CB8AC3E}">
+        <p14:creationId xmlns:p14="http://schemas.microsoft.com/office/powerpoint/2010/main" val="992937121"/>
+      </p:ext>
+    </p:extLst>
+  </p:cSld>
+  <p:clrMapOvr>
+    <a:masterClrMapping/>
+  </p:clrMapOvr>
+</p:sld>
+</file>
+
+<file path=ppt/slides/slide18.xml><?xml version="1.0" encoding="utf-8"?>
 <p:sld xmlns:a="http://schemas.openxmlformats.org/drawingml/2006/main" xmlns:r="http://schemas.openxmlformats.org/officeDocument/2006/relationships" xmlns:p="http://schemas.openxmlformats.org/presentationml/2006/main">
   <p:cSld>
     <p:spTree>
@@ -14961,7 +18635,7 @@
                   <a:ea typeface="Inter Variable Text" panose="02000503000000020004" pitchFamily="2" charset="0"/>
                   <a:cs typeface="Inter Variable Text" panose="02000503000000020004" pitchFamily="2" charset="0"/>
                 </a:rPr>
-                <a:t>11</a:t>
+                <a:t>13</a:t>
               </a:r>
               <a:endParaRPr lang="en-US" sz="1400" dirty="0">
                 <a:solidFill>
@@ -14988,7 +18662,7 @@
 </p:sld>
 </file>
 
-<file path=ppt/slides/slide14.xml><?xml version="1.0" encoding="utf-8"?>
+<file path=ppt/slides/slide19.xml><?xml version="1.0" encoding="utf-8"?>
 <p:sld xmlns:a="http://schemas.openxmlformats.org/drawingml/2006/main" xmlns:r="http://schemas.openxmlformats.org/officeDocument/2006/relationships" xmlns:p="http://schemas.openxmlformats.org/presentationml/2006/main">
   <p:cSld>
     <p:spTree>
@@ -15195,7 +18869,7 @@
                   <a:ea typeface="Inter Variable Text" panose="02000503000000020004" pitchFamily="2" charset="0"/>
                   <a:cs typeface="Inter Variable Text" panose="02000503000000020004" pitchFamily="2" charset="0"/>
                 </a:rPr>
-                <a:t>12</a:t>
+                <a:t>14</a:t>
               </a:r>
               <a:endParaRPr lang="en-US" sz="1400" dirty="0">
                 <a:solidFill>
@@ -18131,8 +21805,8 @@
         </p:nvSpPr>
         <p:spPr>
           <a:xfrm>
-            <a:off x="485193" y="1184989"/>
-            <a:ext cx="4132527" cy="5340298"/>
+            <a:off x="485194" y="1184989"/>
+            <a:ext cx="3921436" cy="5340298"/>
           </a:xfrm>
           <a:prstGeom prst="roundRect">
             <a:avLst>
@@ -18380,7 +22054,7 @@
           <p:nvPr>
             <p:extLst>
               <p:ext uri="{D42A27DB-BD31-4B8C-83A1-F6EECF244321}">
-                <p14:modId xmlns:p14="http://schemas.microsoft.com/office/powerpoint/2010/main" val="1917641404"/>
+                <p14:modId xmlns:p14="http://schemas.microsoft.com/office/powerpoint/2010/main" val="2321489450"/>
               </p:ext>
             </p:extLst>
           </p:nvPr>
@@ -19647,7 +23321,6 @@
           </a:bodyPr>
           <a:lstStyle/>
           <a:p>
-            <a:pPr indent="266700"/>
             <a:r>
               <a:rPr lang="ru-RU" sz="2400" b="1" dirty="0">
                 <a:latin typeface="Times New Roman" panose="02020603050405020304" pitchFamily="18" charset="0"/>
@@ -19657,7 +23330,7 @@
             </a:r>
           </a:p>
           <a:p>
-            <a:pPr marL="285750" indent="-285750">
+            <a:pPr marL="268288" indent="-268288">
               <a:buFontTx/>
               <a:buChar char="-"/>
             </a:pPr>
@@ -20015,7 +23688,6 @@
           </a:bodyPr>
           <a:lstStyle/>
           <a:p>
-            <a:pPr indent="360363"/>
             <a:r>
               <a:rPr lang="ru-RU" sz="2400" b="1" dirty="0">
                 <a:latin typeface="Times New Roman" panose="02020603050405020304" pitchFamily="18" charset="0"/>
@@ -20106,7 +23778,7 @@
         <p:spPr>
           <a:xfrm>
             <a:off x="3908081" y="1259183"/>
-            <a:ext cx="3888197" cy="2308324"/>
+            <a:ext cx="3917463" cy="2677656"/>
           </a:xfrm>
           <a:prstGeom prst="rect">
             <a:avLst/>
@@ -20119,7 +23791,6 @@
           </a:bodyPr>
           <a:lstStyle/>
           <a:p>
-            <a:pPr indent="360363"/>
             <a:r>
               <a:rPr lang="ru-RU" sz="2400" b="1" dirty="0">
                 <a:latin typeface="Times New Roman" panose="02020603050405020304" pitchFamily="18" charset="0"/>
@@ -20129,7 +23800,7 @@
             </a:r>
           </a:p>
           <a:p>
-            <a:pPr marL="342900" indent="-342900">
+            <a:pPr marL="268288" indent="-268288">
               <a:buFontTx/>
               <a:buChar char="-"/>
             </a:pPr>
@@ -20138,11 +23809,11 @@
                 <a:latin typeface="Times New Roman" panose="02020603050405020304" pitchFamily="18" charset="0"/>
                 <a:cs typeface="Times New Roman" panose="02020603050405020304" pitchFamily="18" charset="0"/>
               </a:rPr>
-              <a:t>Недостаток человеческой поддержки</a:t>
+              <a:t>Недостаток наставнической поддержки</a:t>
             </a:r>
           </a:p>
           <a:p>
-            <a:pPr marL="342900" indent="-342900">
+            <a:pPr marL="268288" indent="-268288">
               <a:buFontTx/>
               <a:buChar char="-"/>
             </a:pPr>
@@ -20184,7 +23855,6 @@
           </a:bodyPr>
           <a:lstStyle/>
           <a:p>
-            <a:pPr indent="360363"/>
             <a:r>
               <a:rPr lang="ru-RU" sz="2400" b="1" dirty="0">
                 <a:latin typeface="Times New Roman" panose="02020603050405020304" pitchFamily="18" charset="0"/>
@@ -20910,8 +24580,8 @@
         </p:nvSpPr>
         <p:spPr>
           <a:xfrm>
-            <a:off x="497840" y="2090172"/>
-            <a:ext cx="3286760" cy="2677656"/>
+            <a:off x="467951" y="1720840"/>
+            <a:ext cx="3286760" cy="3416320"/>
           </a:xfrm>
           <a:prstGeom prst="rect">
             <a:avLst/>
@@ -20929,7 +24599,7 @@
                 <a:latin typeface="Times New Roman" panose="02020603050405020304" pitchFamily="18" charset="0"/>
                 <a:cs typeface="Times New Roman" panose="02020603050405020304" pitchFamily="18" charset="0"/>
               </a:rPr>
-              <a:t>Архитектура методики включает четыре ключевых компонента, каждый из которых имеет свой функционал и механизм реализации.</a:t>
+              <a:t>Архитектура методики включает четыре ключевых компонента, каждый из которых имеет свой функционал, механизм реализации и актуальна для пользователей до 30 лет.</a:t>
             </a:r>
           </a:p>
         </p:txBody>
@@ -24895,7 +28565,24 @@
                 <a:latin typeface="Times New Roman" panose="02020603050405020304" pitchFamily="18" charset="0"/>
                 <a:cs typeface="Times New Roman" panose="02020603050405020304" pitchFamily="18" charset="0"/>
               </a:rPr>
-              <a:t>В отличие от традиционных трекеров, фокус методики смещен с пассивной фиксации действий на активное конструирование устойчивой мотивационной среды.</a:t>
+              <a:t>В отличие от традиционных трекеров, фокус методики смещен с пассивной фиксации действий на </a:t>
+            </a:r>
+            <a:r>
+              <a:rPr lang="ru-RU" sz="2400" dirty="0">
+                <a:solidFill>
+                  <a:srgbClr val="274E9C"/>
+                </a:solidFill>
+                <a:latin typeface="Times New Roman" panose="02020603050405020304" pitchFamily="18" charset="0"/>
+                <a:cs typeface="Times New Roman" panose="02020603050405020304" pitchFamily="18" charset="0"/>
+              </a:rPr>
+              <a:t>активное конструирование </a:t>
+            </a:r>
+            <a:r>
+              <a:rPr lang="ru-RU" sz="2400" dirty="0">
+                <a:latin typeface="Times New Roman" panose="02020603050405020304" pitchFamily="18" charset="0"/>
+                <a:cs typeface="Times New Roman" panose="02020603050405020304" pitchFamily="18" charset="0"/>
+              </a:rPr>
+              <a:t>устойчивой мотивационной среды.</a:t>
             </a:r>
           </a:p>
         </p:txBody>
